--- a/docs/Vývoj algoritmu zarovnávání optických elementů.pptx
+++ b/docs/Vývoj algoritmu zarovnávání optických elementů.pptx
@@ -5,24 +5,25 @@
     <p:sldMasterId id="2147483648" r:id="rId1"/>
   </p:sldMasterIdLst>
   <p:notesMasterIdLst>
-    <p:notesMasterId r:id="rId14"/>
+    <p:notesMasterId r:id="rId15"/>
   </p:notesMasterIdLst>
   <p:handoutMasterIdLst>
-    <p:handoutMasterId r:id="rId15"/>
+    <p:handoutMasterId r:id="rId16"/>
   </p:handoutMasterIdLst>
   <p:sldIdLst>
     <p:sldId id="308" r:id="rId2"/>
-    <p:sldId id="312" r:id="rId3"/>
-    <p:sldId id="314" r:id="rId4"/>
-    <p:sldId id="326" r:id="rId5"/>
-    <p:sldId id="327" r:id="rId6"/>
-    <p:sldId id="333" r:id="rId7"/>
-    <p:sldId id="329" r:id="rId8"/>
-    <p:sldId id="334" r:id="rId9"/>
-    <p:sldId id="330" r:id="rId10"/>
-    <p:sldId id="331" r:id="rId11"/>
-    <p:sldId id="332" r:id="rId12"/>
-    <p:sldId id="322" r:id="rId13"/>
+    <p:sldId id="314" r:id="rId3"/>
+    <p:sldId id="327" r:id="rId4"/>
+    <p:sldId id="336" r:id="rId5"/>
+    <p:sldId id="335" r:id="rId6"/>
+    <p:sldId id="337" r:id="rId7"/>
+    <p:sldId id="338" r:id="rId8"/>
+    <p:sldId id="339" r:id="rId9"/>
+    <p:sldId id="340" r:id="rId10"/>
+    <p:sldId id="330" r:id="rId11"/>
+    <p:sldId id="331" r:id="rId12"/>
+    <p:sldId id="332" r:id="rId13"/>
+    <p:sldId id="322" r:id="rId14"/>
   </p:sldIdLst>
   <p:sldSz cx="9144000" cy="5143500" type="screen16x9"/>
   <p:notesSz cx="6858000" cy="9144000"/>
@@ -429,7 +430,7 @@
           <a:p>
             <a:fld id="{9AB667F0-AAF2-1C40-8CBB-C161C73BDB1E}" type="datetimeFigureOut">
               <a:rPr lang="en-CZ" smtClean="0"/>
-              <a:t>02/18/2026</a:t>
+              <a:t>04/01/2026</a:t>
             </a:fld>
             <a:endParaRPr lang="en-CZ"/>
           </a:p>
@@ -680,72 +681,6 @@
 </p:notesMaster>
 </file>
 
-<file path=ppt/notesSlides/notesSlide1.xml><?xml version="1.0" encoding="utf-8"?>
-<p:notes xmlns:a="http://schemas.openxmlformats.org/drawingml/2006/main" xmlns:r="http://schemas.openxmlformats.org/officeDocument/2006/relationships" xmlns:p="http://schemas.openxmlformats.org/presentationml/2006/main">
-  <p:cSld>
-    <p:spTree>
-      <p:nvGrpSpPr>
-        <p:cNvPr id="1" name=""/>
-        <p:cNvGrpSpPr/>
-        <p:nvPr/>
-      </p:nvGrpSpPr>
-      <p:grpSpPr>
-        <a:xfrm>
-          <a:off x="0" y="0"/>
-          <a:ext cx="0" cy="0"/>
-          <a:chOff x="0" y="0"/>
-          <a:chExt cx="0" cy="0"/>
-        </a:xfrm>
-      </p:grpSpPr>
-      <p:sp>
-        <p:nvSpPr>
-          <p:cNvPr id="2" name="Slide Image Placeholder 1"/>
-          <p:cNvSpPr>
-            <a:spLocks noGrp="1" noRot="1" noChangeAspect="1"/>
-          </p:cNvSpPr>
-          <p:nvPr>
-            <p:ph type="sldImg"/>
-          </p:nvPr>
-        </p:nvSpPr>
-        <p:spPr>
-          <a:xfrm>
-            <a:off x="381000" y="685800"/>
-            <a:ext cx="6096000" cy="3429000"/>
-          </a:xfrm>
-        </p:spPr>
-      </p:sp>
-      <p:sp>
-        <p:nvSpPr>
-          <p:cNvPr id="3" name="Notes Placeholder 2"/>
-          <p:cNvSpPr>
-            <a:spLocks noGrp="1"/>
-          </p:cNvSpPr>
-          <p:nvPr>
-            <p:ph type="body" idx="1"/>
-          </p:nvPr>
-        </p:nvSpPr>
-        <p:spPr/>
-        <p:txBody>
-          <a:bodyPr/>
-          <a:lstStyle/>
-          <a:p>
-            <a:endParaRPr lang="cs-CZ" dirty="0"/>
-          </a:p>
-        </p:txBody>
-      </p:sp>
-    </p:spTree>
-    <p:extLst>
-      <p:ext uri="{BB962C8B-B14F-4D97-AF65-F5344CB8AC3E}">
-        <p14:creationId xmlns:p14="http://schemas.microsoft.com/office/powerpoint/2010/main" val="2021601480"/>
-      </p:ext>
-    </p:extLst>
-  </p:cSld>
-  <p:clrMapOvr>
-    <a:masterClrMapping/>
-  </p:clrMapOvr>
-</p:notes>
-</file>
-
 <file path=ppt/slideLayouts/slideLayout1.xml><?xml version="1.0" encoding="utf-8"?>
 <p:sldLayout xmlns:a="http://schemas.openxmlformats.org/drawingml/2006/main" xmlns:r="http://schemas.openxmlformats.org/officeDocument/2006/relationships" xmlns:p="http://schemas.openxmlformats.org/presentationml/2006/main" userDrawn="1">
   <p:cSld name="TITLE">
@@ -1198,297 +1133,6 @@
 
 <file path=ppt/slideLayouts/slideLayout3.xml><?xml version="1.0" encoding="utf-8"?>
 <p:sldLayout xmlns:a="http://schemas.openxmlformats.org/drawingml/2006/main" xmlns:r="http://schemas.openxmlformats.org/officeDocument/2006/relationships" xmlns:p="http://schemas.openxmlformats.org/presentationml/2006/main" userDrawn="1">
-  <p:cSld name="TITLE_AND_CONTENT">
-    <p:spTree>
-      <p:nvGrpSpPr>
-        <p:cNvPr id="1" name=""/>
-        <p:cNvGrpSpPr/>
-        <p:nvPr/>
-      </p:nvGrpSpPr>
-      <p:grpSpPr>
-        <a:xfrm>
-          <a:off x="0" y="0"/>
-          <a:ext cx="0" cy="0"/>
-          <a:chOff x="0" y="0"/>
-          <a:chExt cx="0" cy="0"/>
-        </a:xfrm>
-      </p:grpSpPr>
-      <p:sp>
-        <p:nvSpPr>
-          <p:cNvPr id="28" name="Title Text"/>
-          <p:cNvSpPr txBox="1">
-            <a:spLocks noGrp="1"/>
-          </p:cNvSpPr>
-          <p:nvPr>
-            <p:ph type="title" hasCustomPrompt="1"/>
-          </p:nvPr>
-        </p:nvSpPr>
-        <p:spPr>
-          <a:xfrm>
-            <a:off x="252000" y="826625"/>
-            <a:ext cx="7560000" cy="572701"/>
-          </a:xfrm>
-          <a:prstGeom prst="rect">
-            <a:avLst/>
-          </a:prstGeom>
-        </p:spPr>
-        <p:txBody>
-          <a:bodyPr lIns="0"/>
-          <a:lstStyle>
-            <a:lvl1pPr>
-              <a:defRPr>
-                <a:solidFill>
-                  <a:schemeClr val="accent1"/>
-                </a:solidFill>
-              </a:defRPr>
-            </a:lvl1pPr>
-          </a:lstStyle>
-          <a:p>
-            <a:r>
-              <a:rPr lang="cs-CZ" noProof="0"/>
-              <a:t>Title Text</a:t>
-            </a:r>
-          </a:p>
-        </p:txBody>
-      </p:sp>
-      <p:sp>
-        <p:nvSpPr>
-          <p:cNvPr id="29" name="Body Level One…"/>
-          <p:cNvSpPr txBox="1">
-            <a:spLocks noGrp="1"/>
-          </p:cNvSpPr>
-          <p:nvPr>
-            <p:ph type="body" idx="1" hasCustomPrompt="1"/>
-          </p:nvPr>
-        </p:nvSpPr>
-        <p:spPr>
-          <a:xfrm>
-            <a:off x="252000" y="1592352"/>
-            <a:ext cx="7560000" cy="2809390"/>
-          </a:xfrm>
-          <a:prstGeom prst="rect">
-            <a:avLst/>
-          </a:prstGeom>
-        </p:spPr>
-        <p:txBody>
-          <a:bodyPr lIns="0">
-            <a:normAutofit/>
-          </a:bodyPr>
-          <a:lstStyle>
-            <a:lvl1pPr>
-              <a:defRPr sz="1600"/>
-            </a:lvl1pPr>
-            <a:lvl2pPr>
-              <a:defRPr sz="1600"/>
-            </a:lvl2pPr>
-            <a:lvl3pPr>
-              <a:defRPr sz="1600"/>
-            </a:lvl3pPr>
-            <a:lvl4pPr>
-              <a:defRPr sz="1600"/>
-            </a:lvl4pPr>
-            <a:lvl5pPr>
-              <a:defRPr sz="1600"/>
-            </a:lvl5pPr>
-          </a:lstStyle>
-          <a:p>
-            <a:r>
-              <a:rPr lang="cs-CZ" noProof="0"/>
-              <a:t>Body Level One</a:t>
-            </a:r>
-          </a:p>
-          <a:p>
-            <a:pPr lvl="1"/>
-            <a:r>
-              <a:rPr lang="cs-CZ" noProof="0"/>
-              <a:t>Body Level Two</a:t>
-            </a:r>
-          </a:p>
-          <a:p>
-            <a:pPr lvl="2"/>
-            <a:r>
-              <a:rPr lang="cs-CZ" noProof="0"/>
-              <a:t>Body Level Three</a:t>
-            </a:r>
-          </a:p>
-          <a:p>
-            <a:pPr lvl="3"/>
-            <a:r>
-              <a:rPr lang="cs-CZ" noProof="0"/>
-              <a:t>Body Level Four</a:t>
-            </a:r>
-          </a:p>
-          <a:p>
-            <a:pPr lvl="4"/>
-            <a:r>
-              <a:rPr lang="cs-CZ" noProof="0"/>
-              <a:t>Body Level Five</a:t>
-            </a:r>
-          </a:p>
-        </p:txBody>
-      </p:sp>
-      <p:sp>
-        <p:nvSpPr>
-          <p:cNvPr id="30" name="Slide Number"/>
-          <p:cNvSpPr txBox="1">
-            <a:spLocks noGrp="1"/>
-          </p:cNvSpPr>
-          <p:nvPr>
-            <p:ph type="sldNum" sz="quarter" idx="2"/>
-          </p:nvPr>
-        </p:nvSpPr>
-        <p:spPr>
-          <a:prstGeom prst="rect">
-            <a:avLst/>
-          </a:prstGeom>
-        </p:spPr>
-        <p:txBody>
-          <a:bodyPr/>
-          <a:lstStyle/>
-          <a:p>
-            <a:fld id="{86CB4B4D-7CA3-9044-876B-883B54F8677D}" type="slidenum">
-              <a:t>‹#›</a:t>
-            </a:fld>
-            <a:endParaRPr/>
-          </a:p>
-        </p:txBody>
-      </p:sp>
-      <p:pic>
-        <p:nvPicPr>
-          <p:cNvPr id="3" name="Picture 2">
-            <a:extLst>
-              <a:ext uri="{FF2B5EF4-FFF2-40B4-BE49-F238E27FC236}">
-                <a16:creationId xmlns:a16="http://schemas.microsoft.com/office/drawing/2014/main" id="{509058F7-A211-DC49-8534-E8DD4F8882C7}"/>
-              </a:ext>
-            </a:extLst>
-          </p:cNvPr>
-          <p:cNvPicPr>
-            <a:picLocks noChangeAspect="1"/>
-          </p:cNvPicPr>
-          <p:nvPr userDrawn="1"/>
-        </p:nvPicPr>
-        <p:blipFill>
-          <a:blip r:embed="rId2" cstate="print">
-            <a:extLst>
-              <a:ext uri="{28A0092B-C50C-407E-A947-70E740481C1C}">
-                <a14:useLocalDpi xmlns:a14="http://schemas.microsoft.com/office/drawing/2010/main" val="0"/>
-              </a:ext>
-            </a:extLst>
-          </a:blip>
-          <a:stretch>
-            <a:fillRect/>
-          </a:stretch>
-        </p:blipFill>
-        <p:spPr>
-          <a:xfrm>
-            <a:off x="252000" y="4608000"/>
-            <a:ext cx="1638318" cy="288000"/>
-          </a:xfrm>
-          <a:prstGeom prst="rect">
-            <a:avLst/>
-          </a:prstGeom>
-        </p:spPr>
-      </p:pic>
-      <p:sp>
-        <p:nvSpPr>
-          <p:cNvPr id="8" name="Zástupný symbol pro datum 3">
-            <a:extLst>
-              <a:ext uri="{FF2B5EF4-FFF2-40B4-BE49-F238E27FC236}">
-                <a16:creationId xmlns:a16="http://schemas.microsoft.com/office/drawing/2014/main" id="{FDDAE5FD-C8BD-4C72-8601-8EC6B1BE0ED6}"/>
-              </a:ext>
-            </a:extLst>
-          </p:cNvPr>
-          <p:cNvSpPr>
-            <a:spLocks noGrp="1"/>
-          </p:cNvSpPr>
-          <p:nvPr>
-            <p:ph type="dt" sz="half" idx="10"/>
-          </p:nvPr>
-        </p:nvSpPr>
-        <p:spPr>
-          <a:xfrm>
-            <a:off x="7882673" y="209500"/>
-            <a:ext cx="1139279" cy="365125"/>
-          </a:xfrm>
-          <a:prstGeom prst="rect">
-            <a:avLst/>
-          </a:prstGeom>
-        </p:spPr>
-        <p:txBody>
-          <a:bodyPr vert="horz" lIns="91440" tIns="45720" rIns="91440" bIns="45720" rtlCol="0" anchor="t" anchorCtr="0"/>
-          <a:lstStyle>
-            <a:lvl1pPr algn="r">
-              <a:defRPr sz="1000">
-                <a:solidFill>
-                  <a:srgbClr val="595959"/>
-                </a:solidFill>
-              </a:defRPr>
-            </a:lvl1pPr>
-          </a:lstStyle>
-          <a:p>
-            <a:fld id="{B671C09C-26A4-481B-9925-417A93B4C9A9}" type="datetime1">
-              <a:rPr lang="cs-CZ" smtClean="0"/>
-              <a:t>18.02.2026</a:t>
-            </a:fld>
-            <a:endParaRPr lang="cs-CZ" dirty="0"/>
-          </a:p>
-        </p:txBody>
-      </p:sp>
-      <p:sp>
-        <p:nvSpPr>
-          <p:cNvPr id="9" name="Zástupný symbol pro zápatí 4">
-            <a:extLst>
-              <a:ext uri="{FF2B5EF4-FFF2-40B4-BE49-F238E27FC236}">
-                <a16:creationId xmlns:a16="http://schemas.microsoft.com/office/drawing/2014/main" id="{ABD0A090-7DC4-4045-BD51-179C9D8D2DD2}"/>
-              </a:ext>
-            </a:extLst>
-          </p:cNvPr>
-          <p:cNvSpPr>
-            <a:spLocks noGrp="1"/>
-          </p:cNvSpPr>
-          <p:nvPr>
-            <p:ph type="ftr" sz="quarter" idx="3"/>
-          </p:nvPr>
-        </p:nvSpPr>
-        <p:spPr>
-          <a:xfrm>
-            <a:off x="251999" y="209500"/>
-            <a:ext cx="7560000" cy="365125"/>
-          </a:xfrm>
-          <a:prstGeom prst="rect">
-            <a:avLst/>
-          </a:prstGeom>
-        </p:spPr>
-        <p:txBody>
-          <a:bodyPr vert="horz" lIns="0" tIns="0" rIns="91440" bIns="45720" rtlCol="0" anchor="t" anchorCtr="0"/>
-          <a:lstStyle>
-            <a:lvl1pPr algn="l">
-              <a:defRPr sz="1400">
-                <a:solidFill>
-                  <a:srgbClr val="EA7603"/>
-                </a:solidFill>
-              </a:defRPr>
-            </a:lvl1pPr>
-          </a:lstStyle>
-          <a:p>
-            <a:r>
-              <a:rPr lang="cs-CZ" dirty="0"/>
-              <a:t>Název prezentace</a:t>
-            </a:r>
-          </a:p>
-        </p:txBody>
-      </p:sp>
-    </p:spTree>
-  </p:cSld>
-  <p:clrMapOvr>
-    <a:masterClrMapping/>
-  </p:clrMapOvr>
-  <p:transition spd="med"/>
-</p:sldLayout>
-</file>
-
-<file path=ppt/slideLayouts/slideLayout4.xml><?xml version="1.0" encoding="utf-8"?>
-<p:sldLayout xmlns:a="http://schemas.openxmlformats.org/drawingml/2006/main" xmlns:r="http://schemas.openxmlformats.org/officeDocument/2006/relationships" xmlns:p="http://schemas.openxmlformats.org/presentationml/2006/main" userDrawn="1">
   <p:cSld name="MAIN_POINT">
     <p:spTree>
       <p:nvGrpSpPr>
@@ -1754,7 +1398,7 @@
           <a:p>
             <a:fld id="{250028DA-67BE-4319-9956-88135556FCE7}" type="datetime1">
               <a:rPr lang="cs-CZ" smtClean="0"/>
-              <a:t>18.02.2026</a:t>
+              <a:t>01.04.2026</a:t>
             </a:fld>
             <a:endParaRPr lang="cs-CZ" dirty="0"/>
           </a:p>
@@ -1861,7 +1505,7 @@
           </a:ln>
           <a:extLst>
             <a:ext uri="{C572A759-6A51-4108-AA02-DFA0A04FC94B}">
-              <ma14:wrappingTextBoxFlag xmlns:ma14="http://schemas.microsoft.com/office/mac/drawingml/2011/main" xmlns:a14="http://schemas.microsoft.com/office/drawing/2010/main" xmlns:m="http://schemas.openxmlformats.org/officeDocument/2006/math" xmlns="" val="1"/>
+              <ma14:wrappingTextBoxFlag xmlns="" xmlns:m="http://schemas.openxmlformats.org/officeDocument/2006/math" xmlns:a14="http://schemas.microsoft.com/office/drawing/2010/main" xmlns:ma14="http://schemas.microsoft.com/office/mac/drawingml/2011/main" val="1"/>
             </a:ext>
           </a:extLst>
         </p:spPr>
@@ -1901,7 +1545,7 @@
           </a:ln>
           <a:extLst>
             <a:ext uri="{C572A759-6A51-4108-AA02-DFA0A04FC94B}">
-              <ma14:wrappingTextBoxFlag xmlns:ma14="http://schemas.microsoft.com/office/mac/drawingml/2011/main" xmlns:a14="http://schemas.microsoft.com/office/drawing/2010/main" xmlns:m="http://schemas.openxmlformats.org/officeDocument/2006/math" xmlns="" val="1"/>
+              <ma14:wrappingTextBoxFlag xmlns="" xmlns:m="http://schemas.openxmlformats.org/officeDocument/2006/math" xmlns:a14="http://schemas.microsoft.com/office/drawing/2010/main" xmlns:ma14="http://schemas.microsoft.com/office/mac/drawingml/2011/main" val="1"/>
             </a:ext>
           </a:extLst>
         </p:spPr>
@@ -1997,8 +1641,7 @@
   <p:sldLayoutIdLst>
     <p:sldLayoutId id="2147483649" r:id="rId1"/>
     <p:sldLayoutId id="2147483670" r:id="rId2"/>
-    <p:sldLayoutId id="2147483651" r:id="rId3"/>
-    <p:sldLayoutId id="2147483655" r:id="rId4"/>
+    <p:sldLayoutId id="2147483655" r:id="rId3"/>
   </p:sldLayoutIdLst>
   <p:transition spd="med"/>
   <p:hf hdr="0"/>
@@ -2999,6 +2642,225 @@
         <p:cNvPr id="1" name="">
           <a:extLst>
             <a:ext uri="{FF2B5EF4-FFF2-40B4-BE49-F238E27FC236}">
+              <a16:creationId xmlns:a16="http://schemas.microsoft.com/office/drawing/2014/main" id="{8DC8BAEA-3834-BE57-5340-7BBC4CD1B6C8}"/>
+            </a:ext>
+          </a:extLst>
+        </p:cNvPr>
+        <p:cNvGrpSpPr/>
+        <p:nvPr/>
+      </p:nvGrpSpPr>
+      <p:grpSpPr>
+        <a:xfrm>
+          <a:off x="0" y="0"/>
+          <a:ext cx="0" cy="0"/>
+          <a:chOff x="0" y="0"/>
+          <a:chExt cx="0" cy="0"/>
+        </a:xfrm>
+      </p:grpSpPr>
+      <p:sp>
+        <p:nvSpPr>
+          <p:cNvPr id="2" name="Title 1">
+            <a:extLst>
+              <a:ext uri="{FF2B5EF4-FFF2-40B4-BE49-F238E27FC236}">
+                <a16:creationId xmlns:a16="http://schemas.microsoft.com/office/drawing/2014/main" id="{33A17EAC-FB6A-C679-93FB-BBB76BB67F49}"/>
+              </a:ext>
+            </a:extLst>
+          </p:cNvPr>
+          <p:cNvSpPr>
+            <a:spLocks noGrp="1"/>
+          </p:cNvSpPr>
+          <p:nvPr>
+            <p:ph type="title"/>
+          </p:nvPr>
+        </p:nvSpPr>
+        <p:spPr>
+          <a:xfrm>
+            <a:off x="251999" y="892969"/>
+            <a:ext cx="7560000" cy="560249"/>
+          </a:xfrm>
+        </p:spPr>
+        <p:txBody>
+          <a:bodyPr>
+            <a:noAutofit/>
+          </a:bodyPr>
+          <a:lstStyle/>
+          <a:p>
+            <a:r>
+              <a:rPr lang="cs-CZ" sz="2400" dirty="0"/>
+              <a:t>Vyhodnocení výsledků</a:t>
+            </a:r>
+          </a:p>
+        </p:txBody>
+      </p:sp>
+      <p:sp>
+        <p:nvSpPr>
+          <p:cNvPr id="3" name="Slide Number Placeholder 2">
+            <a:extLst>
+              <a:ext uri="{FF2B5EF4-FFF2-40B4-BE49-F238E27FC236}">
+                <a16:creationId xmlns:a16="http://schemas.microsoft.com/office/drawing/2014/main" id="{A08B371B-F252-EA1D-312D-C6C82953367E}"/>
+              </a:ext>
+            </a:extLst>
+          </p:cNvPr>
+          <p:cNvSpPr>
+            <a:spLocks noGrp="1"/>
+          </p:cNvSpPr>
+          <p:nvPr>
+            <p:ph type="sldNum" sz="quarter" idx="2"/>
+          </p:nvPr>
+        </p:nvSpPr>
+        <p:spPr>
+          <a:xfrm>
+            <a:off x="8684345" y="4700819"/>
+            <a:ext cx="336813" cy="318396"/>
+          </a:xfrm>
+        </p:spPr>
+        <p:txBody>
+          <a:bodyPr/>
+          <a:lstStyle/>
+          <a:p>
+            <a:fld id="{86CB4B4D-7CA3-9044-876B-883B54F8677D}" type="slidenum">
+              <a:rPr lang="en-CZ" smtClean="0"/>
+              <a:pPr/>
+              <a:t>10</a:t>
+            </a:fld>
+            <a:endParaRPr lang="en-CZ"/>
+          </a:p>
+        </p:txBody>
+      </p:sp>
+      <p:sp>
+        <p:nvSpPr>
+          <p:cNvPr id="4" name="Text Placeholder 3">
+            <a:extLst>
+              <a:ext uri="{FF2B5EF4-FFF2-40B4-BE49-F238E27FC236}">
+                <a16:creationId xmlns:a16="http://schemas.microsoft.com/office/drawing/2014/main" id="{8DD35842-56F2-B8CE-44BB-846ED27B3A3F}"/>
+              </a:ext>
+            </a:extLst>
+          </p:cNvPr>
+          <p:cNvSpPr>
+            <a:spLocks noGrp="1"/>
+          </p:cNvSpPr>
+          <p:nvPr>
+            <p:ph type="body" idx="1"/>
+          </p:nvPr>
+        </p:nvSpPr>
+        <p:spPr>
+          <a:xfrm>
+            <a:off x="252000" y="1585914"/>
+            <a:ext cx="7560000" cy="2982962"/>
+          </a:xfrm>
+        </p:spPr>
+        <p:txBody>
+          <a:bodyPr>
+            <a:noAutofit/>
+          </a:bodyPr>
+          <a:lstStyle/>
+          <a:p>
+            <a:pPr algn="just"/>
+            <a:r>
+              <a:rPr lang="cs-CZ" dirty="0"/>
+              <a:t>Dosažení co nejmenšího radiusu vzorku</a:t>
+            </a:r>
+          </a:p>
+          <a:p>
+            <a:pPr algn="just"/>
+            <a:r>
+              <a:rPr lang="cs-CZ" dirty="0"/>
+              <a:t>Dosažená přesnost přibližně 0,01 mm</a:t>
+            </a:r>
+          </a:p>
+          <a:p>
+            <a:pPr algn="just"/>
+            <a:r>
+              <a:rPr lang="cs-CZ" dirty="0"/>
+              <a:t>Vyhodnocení časové náročnosti výpočtu (1-2s)</a:t>
+            </a:r>
+          </a:p>
+        </p:txBody>
+      </p:sp>
+      <p:sp>
+        <p:nvSpPr>
+          <p:cNvPr id="12" name="Zástupný symbol pro zápatí 11">
+            <a:extLst>
+              <a:ext uri="{FF2B5EF4-FFF2-40B4-BE49-F238E27FC236}">
+                <a16:creationId xmlns:a16="http://schemas.microsoft.com/office/drawing/2014/main" id="{B0714987-BC0D-96A4-4A4C-8DE6C57ECB5E}"/>
+              </a:ext>
+            </a:extLst>
+          </p:cNvPr>
+          <p:cNvSpPr>
+            <a:spLocks noGrp="1"/>
+          </p:cNvSpPr>
+          <p:nvPr>
+            <p:ph type="ftr" sz="quarter" idx="3"/>
+          </p:nvPr>
+        </p:nvSpPr>
+        <p:spPr>
+          <a:xfrm>
+            <a:off x="251999" y="209500"/>
+            <a:ext cx="7560000" cy="365125"/>
+          </a:xfrm>
+        </p:spPr>
+        <p:txBody>
+          <a:bodyPr/>
+          <a:lstStyle/>
+          <a:p>
+            <a:r>
+              <a:rPr lang="cs-CZ" dirty="0"/>
+              <a:t>Vývoj algoritmu zarovnávání optických elementů s využitím obrazových dat ze zaměřovací kamery interferometru</a:t>
+            </a:r>
+          </a:p>
+        </p:txBody>
+      </p:sp>
+      <p:sp>
+        <p:nvSpPr>
+          <p:cNvPr id="18" name="Zástupný symbol pro datum 17">
+            <a:extLst>
+              <a:ext uri="{FF2B5EF4-FFF2-40B4-BE49-F238E27FC236}">
+                <a16:creationId xmlns:a16="http://schemas.microsoft.com/office/drawing/2014/main" id="{82FE48BF-71B9-DF3F-73D4-E663B36BF64C}"/>
+              </a:ext>
+            </a:extLst>
+          </p:cNvPr>
+          <p:cNvSpPr>
+            <a:spLocks noGrp="1"/>
+          </p:cNvSpPr>
+          <p:nvPr>
+            <p:ph type="dt" sz="half" idx="11"/>
+          </p:nvPr>
+        </p:nvSpPr>
+        <p:spPr/>
+        <p:txBody>
+          <a:bodyPr/>
+          <a:lstStyle/>
+          <a:p>
+            <a:fld id="{9E039954-0893-4AC6-8021-245AB753B716}" type="datetime1">
+              <a:rPr lang="cs-CZ" smtClean="0"/>
+              <a:t>01.04.2026</a:t>
+            </a:fld>
+            <a:endParaRPr lang="cs-CZ" dirty="0"/>
+          </a:p>
+        </p:txBody>
+      </p:sp>
+    </p:spTree>
+    <p:extLst>
+      <p:ext uri="{BB962C8B-B14F-4D97-AF65-F5344CB8AC3E}">
+        <p14:creationId xmlns:p14="http://schemas.microsoft.com/office/powerpoint/2010/main" val="3305830501"/>
+      </p:ext>
+    </p:extLst>
+  </p:cSld>
+  <p:clrMapOvr>
+    <a:masterClrMapping/>
+  </p:clrMapOvr>
+  <p:transition spd="med"/>
+</p:sld>
+</file>
+
+<file path=ppt/slides/slide11.xml><?xml version="1.0" encoding="utf-8"?>
+<p:sld xmlns:a="http://schemas.openxmlformats.org/drawingml/2006/main" xmlns:r="http://schemas.openxmlformats.org/officeDocument/2006/relationships" xmlns:p="http://schemas.openxmlformats.org/presentationml/2006/main">
+  <p:cSld>
+    <p:spTree>
+      <p:nvGrpSpPr>
+        <p:cNvPr id="1" name="">
+          <a:extLst>
+            <a:ext uri="{FF2B5EF4-FFF2-40B4-BE49-F238E27FC236}">
               <a16:creationId xmlns:a16="http://schemas.microsoft.com/office/drawing/2014/main" id="{3BFB1001-69F9-F3B6-B336-9F1BA6D77FCB}"/>
             </a:ext>
           </a:extLst>
@@ -3079,7 +2941,7 @@
             <a:fld id="{86CB4B4D-7CA3-9044-876B-883B54F8677D}" type="slidenum">
               <a:rPr lang="en-CZ" smtClean="0"/>
               <a:pPr/>
-              <a:t>10</a:t>
+              <a:t>11</a:t>
             </a:fld>
             <a:endParaRPr lang="en-CZ"/>
           </a:p>
@@ -3179,7 +3041,7 @@
           <a:p>
             <a:fld id="{9E039954-0893-4AC6-8021-245AB753B716}" type="datetime1">
               <a:rPr lang="cs-CZ" smtClean="0"/>
-              <a:t>18.02.2026</a:t>
+              <a:t>01.04.2026</a:t>
             </a:fld>
             <a:endParaRPr lang="cs-CZ" dirty="0"/>
           </a:p>
@@ -3199,7 +3061,7 @@
 </p:sld>
 </file>
 
-<file path=ppt/slides/slide11.xml><?xml version="1.0" encoding="utf-8"?>
+<file path=ppt/slides/slide12.xml><?xml version="1.0" encoding="utf-8"?>
 <p:sld xmlns:a="http://schemas.openxmlformats.org/drawingml/2006/main" xmlns:r="http://schemas.openxmlformats.org/officeDocument/2006/relationships" xmlns:p="http://schemas.openxmlformats.org/presentationml/2006/main">
   <p:cSld>
     <p:spTree>
@@ -3287,7 +3149,7 @@
             <a:fld id="{86CB4B4D-7CA3-9044-876B-883B54F8677D}" type="slidenum">
               <a:rPr lang="en-CZ" smtClean="0"/>
               <a:pPr/>
-              <a:t>11</a:t>
+              <a:t>12</a:t>
             </a:fld>
             <a:endParaRPr lang="en-CZ"/>
           </a:p>
@@ -3441,7 +3303,7 @@
           <a:p>
             <a:fld id="{9E039954-0893-4AC6-8021-245AB753B716}" type="datetime1">
               <a:rPr lang="cs-CZ" smtClean="0"/>
-              <a:t>18.02.2026</a:t>
+              <a:t>01.04.2026</a:t>
             </a:fld>
             <a:endParaRPr lang="cs-CZ" dirty="0"/>
           </a:p>
@@ -3461,7 +3323,7 @@
 </p:sld>
 </file>
 
-<file path=ppt/slides/slide12.xml><?xml version="1.0" encoding="utf-8"?>
+<file path=ppt/slides/slide13.xml><?xml version="1.0" encoding="utf-8"?>
 <p:sld xmlns:a="http://schemas.openxmlformats.org/drawingml/2006/main" xmlns:r="http://schemas.openxmlformats.org/officeDocument/2006/relationships" xmlns:p="http://schemas.openxmlformats.org/presentationml/2006/main">
   <p:cSld>
     <p:spTree>
@@ -3597,10 +3459,10 @@
       </p:grpSpPr>
       <p:sp>
         <p:nvSpPr>
-          <p:cNvPr id="11" name="Nadpis 10">
-            <a:extLst>
-              <a:ext uri="{FF2B5EF4-FFF2-40B4-BE49-F238E27FC236}">
-                <a16:creationId xmlns:a16="http://schemas.microsoft.com/office/drawing/2014/main" id="{F9F11BB4-A857-46A6-B49C-C2F99C200953}"/>
+          <p:cNvPr id="2" name="Title 1">
+            <a:extLst>
+              <a:ext uri="{FF2B5EF4-FFF2-40B4-BE49-F238E27FC236}">
+                <a16:creationId xmlns:a16="http://schemas.microsoft.com/office/drawing/2014/main" id="{767DB765-7BB9-4940-BE79-162D40FE63F5}"/>
               </a:ext>
             </a:extLst>
           </p:cNvPr>
@@ -3611,40 +3473,10 @@
             <p:ph type="title"/>
           </p:nvPr>
         </p:nvSpPr>
-        <p:spPr/>
-        <p:txBody>
-          <a:bodyPr>
-            <a:normAutofit/>
-          </a:bodyPr>
-          <a:lstStyle/>
-          <a:p>
-            <a:r>
-              <a:rPr lang="cs-CZ" sz="2400" dirty="0"/>
-              <a:t>Obsah</a:t>
-            </a:r>
-          </a:p>
-        </p:txBody>
-      </p:sp>
-      <p:sp>
-        <p:nvSpPr>
-          <p:cNvPr id="3" name="Text Placeholder 2">
-            <a:extLst>
-              <a:ext uri="{FF2B5EF4-FFF2-40B4-BE49-F238E27FC236}">
-                <a16:creationId xmlns:a16="http://schemas.microsoft.com/office/drawing/2014/main" id="{4C9C22D5-F411-4F47-A18E-FE74300B1E10}"/>
-              </a:ext>
-            </a:extLst>
-          </p:cNvPr>
-          <p:cNvSpPr>
-            <a:spLocks noGrp="1"/>
-          </p:cNvSpPr>
-          <p:nvPr>
-            <p:ph type="body" idx="1"/>
-          </p:nvPr>
-        </p:nvSpPr>
-        <p:spPr>
-          <a:xfrm>
-            <a:off x="252000" y="1214438"/>
-            <a:ext cx="7560000" cy="3187304"/>
+        <p:spPr>
+          <a:xfrm>
+            <a:off x="251999" y="892969"/>
+            <a:ext cx="7560000" cy="560249"/>
           </a:xfrm>
         </p:spPr>
         <p:txBody>
@@ -3653,84 +3485,19 @@
           </a:bodyPr>
           <a:lstStyle/>
           <a:p>
-            <a:pPr marL="114300" indent="0">
-              <a:buNone/>
-            </a:pPr>
-            <a:endParaRPr lang="en-CZ" dirty="0"/>
-          </a:p>
-          <a:p>
             <a:r>
-              <a:rPr lang="cs-CZ" dirty="0"/>
+              <a:rPr lang="cs-CZ" sz="2400" dirty="0"/>
               <a:t>Úvod</a:t>
             </a:r>
-            <a:endParaRPr lang="en-CZ" dirty="0"/>
-          </a:p>
-          <a:p>
-            <a:r>
-              <a:rPr lang="cs-CZ" dirty="0"/>
-              <a:t>Princip interferometrie a zpracování obrazu</a:t>
-            </a:r>
-            <a:endParaRPr lang="en-CZ" dirty="0"/>
-          </a:p>
-          <a:p>
-            <a:r>
-              <a:rPr lang="cs-CZ" dirty="0"/>
-              <a:t>Návrh architektury softwaru</a:t>
-            </a:r>
-          </a:p>
-          <a:p>
-            <a:r>
-              <a:rPr lang="cs-CZ" dirty="0"/>
-              <a:t>Implementace detekčního algoritmu</a:t>
-            </a:r>
-          </a:p>
-          <a:p>
-            <a:pPr lvl="1"/>
-            <a:r>
-              <a:rPr lang="cs-CZ" dirty="0"/>
-              <a:t>Implementace pro osy x,y</a:t>
-            </a:r>
-          </a:p>
-          <a:p>
-            <a:pPr lvl="1"/>
-            <a:r>
-              <a:rPr lang="cs-CZ" dirty="0"/>
-              <a:t>Implementace pro osu z</a:t>
-            </a:r>
-          </a:p>
-          <a:p>
-            <a:r>
-              <a:rPr lang="cs-CZ" dirty="0"/>
-              <a:t>Testování a optimalizace</a:t>
-            </a:r>
-          </a:p>
-          <a:p>
-            <a:r>
-              <a:rPr lang="cs-CZ" dirty="0"/>
-              <a:t>Vyhodnocení výsledků</a:t>
-            </a:r>
-          </a:p>
-          <a:p>
-            <a:r>
-              <a:rPr lang="cs-CZ" dirty="0"/>
-              <a:t>Závěr a přínosy práce</a:t>
-            </a:r>
-          </a:p>
-          <a:p>
-            <a:r>
-              <a:rPr lang="cs-CZ" dirty="0"/>
-              <a:t>Reference</a:t>
-            </a:r>
-            <a:endParaRPr lang="en-CZ" dirty="0"/>
           </a:p>
         </p:txBody>
       </p:sp>
       <p:sp>
         <p:nvSpPr>
-          <p:cNvPr id="4" name="Slide Number Placeholder 3">
-            <a:extLst>
-              <a:ext uri="{FF2B5EF4-FFF2-40B4-BE49-F238E27FC236}">
-                <a16:creationId xmlns:a16="http://schemas.microsoft.com/office/drawing/2014/main" id="{C9F8C8DC-D524-BA4B-96CC-70DEC0069C2C}"/>
+          <p:cNvPr id="3" name="Slide Number Placeholder 2">
+            <a:extLst>
+              <a:ext uri="{FF2B5EF4-FFF2-40B4-BE49-F238E27FC236}">
+                <a16:creationId xmlns:a16="http://schemas.microsoft.com/office/drawing/2014/main" id="{D94B3469-47E2-0F4E-9011-5BFFC9FCF38B}"/>
               </a:ext>
             </a:extLst>
           </p:cNvPr>
@@ -3755,164 +3522,6 @@
               <a:rPr lang="en-CZ" smtClean="0"/>
               <a:pPr/>
               <a:t>2</a:t>
-            </a:fld>
-            <a:endParaRPr lang="en-CZ" dirty="0"/>
-          </a:p>
-        </p:txBody>
-      </p:sp>
-      <p:sp>
-        <p:nvSpPr>
-          <p:cNvPr id="12" name="Zástupný symbol pro zápatí 11">
-            <a:extLst>
-              <a:ext uri="{FF2B5EF4-FFF2-40B4-BE49-F238E27FC236}">
-                <a16:creationId xmlns:a16="http://schemas.microsoft.com/office/drawing/2014/main" id="{65983EB6-9FA1-45FE-8FC4-35CCEBE017E4}"/>
-              </a:ext>
-            </a:extLst>
-          </p:cNvPr>
-          <p:cNvSpPr>
-            <a:spLocks noGrp="1"/>
-          </p:cNvSpPr>
-          <p:nvPr>
-            <p:ph type="ftr" sz="quarter" idx="3"/>
-          </p:nvPr>
-        </p:nvSpPr>
-        <p:spPr/>
-        <p:txBody>
-          <a:bodyPr/>
-          <a:lstStyle/>
-          <a:p>
-            <a:r>
-              <a:rPr lang="cs-CZ" dirty="0"/>
-              <a:t>Vývoj algoritmu zarovnávání optických elementů s využitím obrazových dat ze zaměřovací kamery interferometru</a:t>
-            </a:r>
-          </a:p>
-        </p:txBody>
-      </p:sp>
-      <p:sp>
-        <p:nvSpPr>
-          <p:cNvPr id="14" name="Zástupný symbol pro datum 13">
-            <a:extLst>
-              <a:ext uri="{FF2B5EF4-FFF2-40B4-BE49-F238E27FC236}">
-                <a16:creationId xmlns:a16="http://schemas.microsoft.com/office/drawing/2014/main" id="{A9EA49E4-E3EB-43DE-90EE-2D2E18CA8AA1}"/>
-              </a:ext>
-            </a:extLst>
-          </p:cNvPr>
-          <p:cNvSpPr>
-            <a:spLocks noGrp="1"/>
-          </p:cNvSpPr>
-          <p:nvPr>
-            <p:ph type="dt" sz="half" idx="10"/>
-          </p:nvPr>
-        </p:nvSpPr>
-        <p:spPr/>
-        <p:txBody>
-          <a:bodyPr/>
-          <a:lstStyle/>
-          <a:p>
-            <a:fld id="{5F23132F-313C-44A9-8532-444953540FC9}" type="datetime1">
-              <a:rPr lang="cs-CZ" smtClean="0"/>
-              <a:t>18.02.2026</a:t>
-            </a:fld>
-            <a:endParaRPr lang="cs-CZ" dirty="0"/>
-          </a:p>
-        </p:txBody>
-      </p:sp>
-    </p:spTree>
-    <p:extLst>
-      <p:ext uri="{BB962C8B-B14F-4D97-AF65-F5344CB8AC3E}">
-        <p14:creationId xmlns:p14="http://schemas.microsoft.com/office/powerpoint/2010/main" val="1213738870"/>
-      </p:ext>
-    </p:extLst>
-  </p:cSld>
-  <p:clrMapOvr>
-    <a:masterClrMapping/>
-  </p:clrMapOvr>
-  <p:transition spd="med"/>
-</p:sld>
-</file>
-
-<file path=ppt/slides/slide3.xml><?xml version="1.0" encoding="utf-8"?>
-<p:sld xmlns:a="http://schemas.openxmlformats.org/drawingml/2006/main" xmlns:r="http://schemas.openxmlformats.org/officeDocument/2006/relationships" xmlns:p="http://schemas.openxmlformats.org/presentationml/2006/main">
-  <p:cSld>
-    <p:spTree>
-      <p:nvGrpSpPr>
-        <p:cNvPr id="1" name=""/>
-        <p:cNvGrpSpPr/>
-        <p:nvPr/>
-      </p:nvGrpSpPr>
-      <p:grpSpPr>
-        <a:xfrm>
-          <a:off x="0" y="0"/>
-          <a:ext cx="0" cy="0"/>
-          <a:chOff x="0" y="0"/>
-          <a:chExt cx="0" cy="0"/>
-        </a:xfrm>
-      </p:grpSpPr>
-      <p:sp>
-        <p:nvSpPr>
-          <p:cNvPr id="2" name="Title 1">
-            <a:extLst>
-              <a:ext uri="{FF2B5EF4-FFF2-40B4-BE49-F238E27FC236}">
-                <a16:creationId xmlns:a16="http://schemas.microsoft.com/office/drawing/2014/main" id="{767DB765-7BB9-4940-BE79-162D40FE63F5}"/>
-              </a:ext>
-            </a:extLst>
-          </p:cNvPr>
-          <p:cNvSpPr>
-            <a:spLocks noGrp="1"/>
-          </p:cNvSpPr>
-          <p:nvPr>
-            <p:ph type="title"/>
-          </p:nvPr>
-        </p:nvSpPr>
-        <p:spPr>
-          <a:xfrm>
-            <a:off x="251999" y="892969"/>
-            <a:ext cx="7560000" cy="560249"/>
-          </a:xfrm>
-        </p:spPr>
-        <p:txBody>
-          <a:bodyPr>
-            <a:noAutofit/>
-          </a:bodyPr>
-          <a:lstStyle/>
-          <a:p>
-            <a:r>
-              <a:rPr lang="cs-CZ" sz="2400" dirty="0"/>
-              <a:t>Úvod</a:t>
-            </a:r>
-          </a:p>
-        </p:txBody>
-      </p:sp>
-      <p:sp>
-        <p:nvSpPr>
-          <p:cNvPr id="3" name="Slide Number Placeholder 2">
-            <a:extLst>
-              <a:ext uri="{FF2B5EF4-FFF2-40B4-BE49-F238E27FC236}">
-                <a16:creationId xmlns:a16="http://schemas.microsoft.com/office/drawing/2014/main" id="{D94B3469-47E2-0F4E-9011-5BFFC9FCF38B}"/>
-              </a:ext>
-            </a:extLst>
-          </p:cNvPr>
-          <p:cNvSpPr>
-            <a:spLocks noGrp="1"/>
-          </p:cNvSpPr>
-          <p:nvPr>
-            <p:ph type="sldNum" sz="quarter" idx="2"/>
-          </p:nvPr>
-        </p:nvSpPr>
-        <p:spPr>
-          <a:xfrm>
-            <a:off x="8684345" y="4700819"/>
-            <a:ext cx="336813" cy="318396"/>
-          </a:xfrm>
-        </p:spPr>
-        <p:txBody>
-          <a:bodyPr/>
-          <a:lstStyle/>
-          <a:p>
-            <a:fld id="{86CB4B4D-7CA3-9044-876B-883B54F8677D}" type="slidenum">
-              <a:rPr lang="en-CZ" smtClean="0"/>
-              <a:pPr/>
-              <a:t>3</a:t>
             </a:fld>
             <a:endParaRPr lang="en-CZ"/>
           </a:p>
@@ -4012,7 +3621,7 @@
           <a:p>
             <a:fld id="{9E039954-0893-4AC6-8021-245AB753B716}" type="datetime1">
               <a:rPr lang="cs-CZ" smtClean="0"/>
-              <a:t>18.02.2026</a:t>
+              <a:t>01.04.2026</a:t>
             </a:fld>
             <a:endParaRPr lang="cs-CZ" dirty="0"/>
           </a:p>
@@ -4032,263 +3641,7 @@
 </p:sld>
 </file>
 
-<file path=ppt/slides/slide4.xml><?xml version="1.0" encoding="utf-8"?>
-<p:sld xmlns:a="http://schemas.openxmlformats.org/drawingml/2006/main" xmlns:r="http://schemas.openxmlformats.org/officeDocument/2006/relationships" xmlns:p="http://schemas.openxmlformats.org/presentationml/2006/main">
-  <p:cSld>
-    <p:spTree>
-      <p:nvGrpSpPr>
-        <p:cNvPr id="1" name="">
-          <a:extLst>
-            <a:ext uri="{FF2B5EF4-FFF2-40B4-BE49-F238E27FC236}">
-              <a16:creationId xmlns:a16="http://schemas.microsoft.com/office/drawing/2014/main" id="{7FEC90C5-BEB2-EB00-892B-30539350B691}"/>
-            </a:ext>
-          </a:extLst>
-        </p:cNvPr>
-        <p:cNvGrpSpPr/>
-        <p:nvPr/>
-      </p:nvGrpSpPr>
-      <p:grpSpPr>
-        <a:xfrm>
-          <a:off x="0" y="0"/>
-          <a:ext cx="0" cy="0"/>
-          <a:chOff x="0" y="0"/>
-          <a:chExt cx="0" cy="0"/>
-        </a:xfrm>
-      </p:grpSpPr>
-      <p:sp>
-        <p:nvSpPr>
-          <p:cNvPr id="2" name="Title 1">
-            <a:extLst>
-              <a:ext uri="{FF2B5EF4-FFF2-40B4-BE49-F238E27FC236}">
-                <a16:creationId xmlns:a16="http://schemas.microsoft.com/office/drawing/2014/main" id="{83D3A48A-934C-AF4F-25A7-F782D227A580}"/>
-              </a:ext>
-            </a:extLst>
-          </p:cNvPr>
-          <p:cNvSpPr>
-            <a:spLocks noGrp="1"/>
-          </p:cNvSpPr>
-          <p:nvPr>
-            <p:ph type="title"/>
-          </p:nvPr>
-        </p:nvSpPr>
-        <p:spPr>
-          <a:xfrm>
-            <a:off x="251999" y="892969"/>
-            <a:ext cx="7560000" cy="560249"/>
-          </a:xfrm>
-        </p:spPr>
-        <p:txBody>
-          <a:bodyPr>
-            <a:noAutofit/>
-          </a:bodyPr>
-          <a:lstStyle/>
-          <a:p>
-            <a:r>
-              <a:rPr lang="cs-CZ" sz="2400" dirty="0"/>
-              <a:t>Princip interferometrie a zpracování obrazu</a:t>
-            </a:r>
-            <a:endParaRPr lang="en-CZ" sz="2400" dirty="0"/>
-          </a:p>
-        </p:txBody>
-      </p:sp>
-      <p:sp>
-        <p:nvSpPr>
-          <p:cNvPr id="3" name="Slide Number Placeholder 2">
-            <a:extLst>
-              <a:ext uri="{FF2B5EF4-FFF2-40B4-BE49-F238E27FC236}">
-                <a16:creationId xmlns:a16="http://schemas.microsoft.com/office/drawing/2014/main" id="{D6AE0843-A92F-CF29-7995-5EA5662F3E42}"/>
-              </a:ext>
-            </a:extLst>
-          </p:cNvPr>
-          <p:cNvSpPr>
-            <a:spLocks noGrp="1"/>
-          </p:cNvSpPr>
-          <p:nvPr>
-            <p:ph type="sldNum" sz="quarter" idx="2"/>
-          </p:nvPr>
-        </p:nvSpPr>
-        <p:spPr>
-          <a:xfrm>
-            <a:off x="8684345" y="4700819"/>
-            <a:ext cx="336813" cy="318396"/>
-          </a:xfrm>
-        </p:spPr>
-        <p:txBody>
-          <a:bodyPr/>
-          <a:lstStyle/>
-          <a:p>
-            <a:fld id="{86CB4B4D-7CA3-9044-876B-883B54F8677D}" type="slidenum">
-              <a:rPr lang="en-CZ" smtClean="0"/>
-              <a:pPr/>
-              <a:t>4</a:t>
-            </a:fld>
-            <a:endParaRPr lang="en-CZ"/>
-          </a:p>
-        </p:txBody>
-      </p:sp>
-      <p:sp>
-        <p:nvSpPr>
-          <p:cNvPr id="4" name="Text Placeholder 3">
-            <a:extLst>
-              <a:ext uri="{FF2B5EF4-FFF2-40B4-BE49-F238E27FC236}">
-                <a16:creationId xmlns:a16="http://schemas.microsoft.com/office/drawing/2014/main" id="{92E9E278-9B6C-9D49-ADE7-CBCDA4BE1E62}"/>
-              </a:ext>
-            </a:extLst>
-          </p:cNvPr>
-          <p:cNvSpPr>
-            <a:spLocks noGrp="1"/>
-          </p:cNvSpPr>
-          <p:nvPr>
-            <p:ph type="body" idx="1"/>
-          </p:nvPr>
-        </p:nvSpPr>
-        <p:spPr>
-          <a:xfrm>
-            <a:off x="252000" y="1585914"/>
-            <a:ext cx="7560000" cy="2982962"/>
-          </a:xfrm>
-        </p:spPr>
-        <p:txBody>
-          <a:bodyPr>
-            <a:noAutofit/>
-          </a:bodyPr>
-          <a:lstStyle/>
-          <a:p>
-            <a:pPr algn="just"/>
-            <a:r>
-              <a:rPr lang="cs-CZ" sz="1200" dirty="0"/>
-              <a:t>Interference světla pro přesné určení polohy</a:t>
-            </a:r>
-          </a:p>
-          <a:p>
-            <a:pPr algn="just"/>
-            <a:r>
-              <a:rPr lang="cs-CZ" sz="1200" dirty="0"/>
-              <a:t>Snímání obrazu zaměřovací kamerou</a:t>
-            </a:r>
-          </a:p>
-          <a:p>
-            <a:pPr algn="just"/>
-            <a:r>
-              <a:rPr lang="cs-CZ" sz="1200" dirty="0"/>
-              <a:t>Detekce polohy vzorku pomocí algoritmu</a:t>
-            </a:r>
-          </a:p>
-        </p:txBody>
-      </p:sp>
-      <p:sp>
-        <p:nvSpPr>
-          <p:cNvPr id="12" name="Zástupný symbol pro zápatí 11">
-            <a:extLst>
-              <a:ext uri="{FF2B5EF4-FFF2-40B4-BE49-F238E27FC236}">
-                <a16:creationId xmlns:a16="http://schemas.microsoft.com/office/drawing/2014/main" id="{D562D4B5-BE4B-BA50-C385-E85CA2E84B13}"/>
-              </a:ext>
-            </a:extLst>
-          </p:cNvPr>
-          <p:cNvSpPr>
-            <a:spLocks noGrp="1"/>
-          </p:cNvSpPr>
-          <p:nvPr>
-            <p:ph type="ftr" sz="quarter" idx="3"/>
-          </p:nvPr>
-        </p:nvSpPr>
-        <p:spPr>
-          <a:xfrm>
-            <a:off x="251999" y="209500"/>
-            <a:ext cx="7560000" cy="365125"/>
-          </a:xfrm>
-        </p:spPr>
-        <p:txBody>
-          <a:bodyPr/>
-          <a:lstStyle/>
-          <a:p>
-            <a:r>
-              <a:rPr lang="cs-CZ" dirty="0"/>
-              <a:t>Vývoj algoritmu zarovnávání optických elementů s využitím obrazových dat ze zaměřovací kamery interferometru</a:t>
-            </a:r>
-          </a:p>
-        </p:txBody>
-      </p:sp>
-      <p:sp>
-        <p:nvSpPr>
-          <p:cNvPr id="18" name="Zástupný symbol pro datum 17">
-            <a:extLst>
-              <a:ext uri="{FF2B5EF4-FFF2-40B4-BE49-F238E27FC236}">
-                <a16:creationId xmlns:a16="http://schemas.microsoft.com/office/drawing/2014/main" id="{E76426F3-C1F0-437B-2357-03A83CC87A06}"/>
-              </a:ext>
-            </a:extLst>
-          </p:cNvPr>
-          <p:cNvSpPr>
-            <a:spLocks noGrp="1"/>
-          </p:cNvSpPr>
-          <p:nvPr>
-            <p:ph type="dt" sz="half" idx="11"/>
-          </p:nvPr>
-        </p:nvSpPr>
-        <p:spPr/>
-        <p:txBody>
-          <a:bodyPr/>
-          <a:lstStyle/>
-          <a:p>
-            <a:fld id="{9E039954-0893-4AC6-8021-245AB753B716}" type="datetime1">
-              <a:rPr lang="cs-CZ" smtClean="0"/>
-              <a:t>18.02.2026</a:t>
-            </a:fld>
-            <a:endParaRPr lang="cs-CZ" dirty="0"/>
-          </a:p>
-        </p:txBody>
-      </p:sp>
-      <p:pic>
-        <p:nvPicPr>
-          <p:cNvPr id="6" name="Picture 5">
-            <a:extLst>
-              <a:ext uri="{FF2B5EF4-FFF2-40B4-BE49-F238E27FC236}">
-                <a16:creationId xmlns:a16="http://schemas.microsoft.com/office/drawing/2014/main" id="{248C6BD3-1CC5-C081-3981-6C3F5CDF7040}"/>
-              </a:ext>
-            </a:extLst>
-          </p:cNvPr>
-          <p:cNvPicPr>
-            <a:picLocks noChangeAspect="1"/>
-          </p:cNvPicPr>
-          <p:nvPr/>
-        </p:nvPicPr>
-        <p:blipFill>
-          <a:blip r:embed="rId2">
-            <a:extLst>
-              <a:ext uri="{28A0092B-C50C-407E-A947-70E740481C1C}">
-                <a14:useLocalDpi xmlns:a14="http://schemas.microsoft.com/office/drawing/2010/main" val="0"/>
-              </a:ext>
-            </a:extLst>
-          </a:blip>
-          <a:stretch>
-            <a:fillRect/>
-          </a:stretch>
-        </p:blipFill>
-        <p:spPr>
-          <a:xfrm>
-            <a:off x="4299628" y="1906284"/>
-            <a:ext cx="4315427" cy="2534004"/>
-          </a:xfrm>
-          <a:prstGeom prst="rect">
-            <a:avLst/>
-          </a:prstGeom>
-        </p:spPr>
-      </p:pic>
-    </p:spTree>
-    <p:extLst>
-      <p:ext uri="{BB962C8B-B14F-4D97-AF65-F5344CB8AC3E}">
-        <p14:creationId xmlns:p14="http://schemas.microsoft.com/office/powerpoint/2010/main" val="637648232"/>
-      </p:ext>
-    </p:extLst>
-  </p:cSld>
-  <p:clrMapOvr>
-    <a:masterClrMapping/>
-  </p:clrMapOvr>
-  <p:transition spd="med"/>
-</p:sld>
-</file>
-
-<file path=ppt/slides/slide5.xml><?xml version="1.0" encoding="utf-8"?>
+<file path=ppt/slides/slide3.xml><?xml version="1.0" encoding="utf-8"?>
 <p:sld xmlns:a="http://schemas.openxmlformats.org/drawingml/2006/main" xmlns:r="http://schemas.openxmlformats.org/officeDocument/2006/relationships" xmlns:p="http://schemas.openxmlformats.org/presentationml/2006/main">
   <p:cSld>
     <p:spTree>
@@ -4375,7 +3728,7 @@
             <a:fld id="{86CB4B4D-7CA3-9044-876B-883B54F8677D}" type="slidenum">
               <a:rPr lang="en-CZ" smtClean="0"/>
               <a:pPr/>
-              <a:t>5</a:t>
+              <a:t>3</a:t>
             </a:fld>
             <a:endParaRPr lang="en-CZ"/>
           </a:p>
@@ -4419,19 +3772,11 @@
             <a:pPr algn="just"/>
             <a:r>
               <a:rPr lang="cs-CZ" sz="1200" dirty="0"/>
-              <a:t>Oddělení vrstev: </a:t>
+              <a:t>Bloky si předávají instrukce jak postupovat dál</a:t>
             </a:r>
-            <a:r>
-              <a:rPr lang="cs-CZ" sz="1200" b="1" dirty="0"/>
-              <a:t>vstup dat → zpracování → výstup doporučení</a:t>
-            </a:r>
           </a:p>
           <a:p>
             <a:pPr algn="just"/>
-            <a:r>
-              <a:rPr lang="it-IT" sz="1200" dirty="0"/>
-              <a:t>Logování a konfigurace parametrů (pro ladění a opakovatelnost)</a:t>
-            </a:r>
             <a:endParaRPr lang="cs-CZ" sz="1200" dirty="0"/>
           </a:p>
         </p:txBody>
@@ -4492,7 +3837,7 @@
           <a:p>
             <a:fld id="{9E039954-0893-4AC6-8021-245AB753B716}" type="datetime1">
               <a:rPr lang="cs-CZ" smtClean="0"/>
-              <a:t>18.02.2026</a:t>
+              <a:t>01.04.2026</a:t>
             </a:fld>
             <a:endParaRPr lang="cs-CZ" dirty="0"/>
           </a:p>
@@ -4500,10 +3845,10 @@
       </p:sp>
       <p:pic>
         <p:nvPicPr>
-          <p:cNvPr id="6" name="Picture 5">
-            <a:extLst>
-              <a:ext uri="{FF2B5EF4-FFF2-40B4-BE49-F238E27FC236}">
-                <a16:creationId xmlns:a16="http://schemas.microsoft.com/office/drawing/2014/main" id="{6657A78D-D12B-ACFC-D089-7E369FEC7B53}"/>
+          <p:cNvPr id="7" name="Picture 6">
+            <a:extLst>
+              <a:ext uri="{FF2B5EF4-FFF2-40B4-BE49-F238E27FC236}">
+                <a16:creationId xmlns:a16="http://schemas.microsoft.com/office/drawing/2014/main" id="{FD621FE3-9F2A-2811-30AF-CBC5B51E264F}"/>
               </a:ext>
             </a:extLst>
           </p:cNvPr>
@@ -4526,8 +3871,8 @@
         </p:blipFill>
         <p:spPr>
           <a:xfrm>
-            <a:off x="5490273" y="789801"/>
-            <a:ext cx="2552140" cy="3911018"/>
+            <a:off x="5740316" y="864679"/>
+            <a:ext cx="2997503" cy="3836140"/>
           </a:xfrm>
           <a:prstGeom prst="rect">
             <a:avLst/>
@@ -4538,6 +3883,778 @@
     <p:extLst>
       <p:ext uri="{BB962C8B-B14F-4D97-AF65-F5344CB8AC3E}">
         <p14:creationId xmlns:p14="http://schemas.microsoft.com/office/powerpoint/2010/main" val="1905947620"/>
+      </p:ext>
+    </p:extLst>
+  </p:cSld>
+  <p:clrMapOvr>
+    <a:masterClrMapping/>
+  </p:clrMapOvr>
+  <p:transition spd="med"/>
+</p:sld>
+</file>
+
+<file path=ppt/slides/slide4.xml><?xml version="1.0" encoding="utf-8"?>
+<p:sld xmlns:a="http://schemas.openxmlformats.org/drawingml/2006/main" xmlns:r="http://schemas.openxmlformats.org/officeDocument/2006/relationships" xmlns:p="http://schemas.openxmlformats.org/presentationml/2006/main">
+  <p:cSld>
+    <p:spTree>
+      <p:nvGrpSpPr>
+        <p:cNvPr id="1" name="">
+          <a:extLst>
+            <a:ext uri="{FF2B5EF4-FFF2-40B4-BE49-F238E27FC236}">
+              <a16:creationId xmlns:a16="http://schemas.microsoft.com/office/drawing/2014/main" id="{41BAD987-EC38-5ABB-FE5F-F654BA9B79CB}"/>
+            </a:ext>
+          </a:extLst>
+        </p:cNvPr>
+        <p:cNvGrpSpPr/>
+        <p:nvPr/>
+      </p:nvGrpSpPr>
+      <p:grpSpPr>
+        <a:xfrm>
+          <a:off x="0" y="0"/>
+          <a:ext cx="0" cy="0"/>
+          <a:chOff x="0" y="0"/>
+          <a:chExt cx="0" cy="0"/>
+        </a:xfrm>
+      </p:grpSpPr>
+      <p:pic>
+        <p:nvPicPr>
+          <p:cNvPr id="15" name="Picture 14">
+            <a:extLst>
+              <a:ext uri="{FF2B5EF4-FFF2-40B4-BE49-F238E27FC236}">
+                <a16:creationId xmlns:a16="http://schemas.microsoft.com/office/drawing/2014/main" id="{67BB6D68-3DFD-2EDC-6051-96DC7DD28916}"/>
+              </a:ext>
+            </a:extLst>
+          </p:cNvPr>
+          <p:cNvPicPr>
+            <a:picLocks noChangeAspect="1"/>
+          </p:cNvPicPr>
+          <p:nvPr/>
+        </p:nvPicPr>
+        <p:blipFill>
+          <a:blip r:embed="rId2">
+            <a:extLst>
+              <a:ext uri="{28A0092B-C50C-407E-A947-70E740481C1C}">
+                <a14:useLocalDpi xmlns:a14="http://schemas.microsoft.com/office/drawing/2010/main" val="0"/>
+              </a:ext>
+            </a:extLst>
+          </a:blip>
+          <a:stretch>
+            <a:fillRect/>
+          </a:stretch>
+        </p:blipFill>
+        <p:spPr>
+          <a:xfrm>
+            <a:off x="5740316" y="864679"/>
+            <a:ext cx="2997503" cy="3836140"/>
+          </a:xfrm>
+          <a:prstGeom prst="rect">
+            <a:avLst/>
+          </a:prstGeom>
+        </p:spPr>
+      </p:pic>
+      <p:sp>
+        <p:nvSpPr>
+          <p:cNvPr id="2" name="Title 1">
+            <a:extLst>
+              <a:ext uri="{FF2B5EF4-FFF2-40B4-BE49-F238E27FC236}">
+                <a16:creationId xmlns:a16="http://schemas.microsoft.com/office/drawing/2014/main" id="{67304879-3DE6-C92D-830B-947E6573A011}"/>
+              </a:ext>
+            </a:extLst>
+          </p:cNvPr>
+          <p:cNvSpPr>
+            <a:spLocks noGrp="1"/>
+          </p:cNvSpPr>
+          <p:nvPr>
+            <p:ph type="title"/>
+          </p:nvPr>
+        </p:nvSpPr>
+        <p:spPr>
+          <a:xfrm>
+            <a:off x="251999" y="892969"/>
+            <a:ext cx="7560000" cy="560249"/>
+          </a:xfrm>
+        </p:spPr>
+        <p:txBody>
+          <a:bodyPr>
+            <a:noAutofit/>
+          </a:bodyPr>
+          <a:lstStyle/>
+          <a:p>
+            <a:r>
+              <a:rPr lang="cs-CZ" sz="2400" dirty="0"/>
+              <a:t>Start</a:t>
+            </a:r>
+          </a:p>
+        </p:txBody>
+      </p:sp>
+      <p:sp>
+        <p:nvSpPr>
+          <p:cNvPr id="3" name="Slide Number Placeholder 2">
+            <a:extLst>
+              <a:ext uri="{FF2B5EF4-FFF2-40B4-BE49-F238E27FC236}">
+                <a16:creationId xmlns:a16="http://schemas.microsoft.com/office/drawing/2014/main" id="{27F2A8EC-066F-0CB1-4364-681FB89C1D8D}"/>
+              </a:ext>
+            </a:extLst>
+          </p:cNvPr>
+          <p:cNvSpPr>
+            <a:spLocks noGrp="1"/>
+          </p:cNvSpPr>
+          <p:nvPr>
+            <p:ph type="sldNum" sz="quarter" idx="2"/>
+          </p:nvPr>
+        </p:nvSpPr>
+        <p:spPr>
+          <a:xfrm>
+            <a:off x="8684345" y="4700819"/>
+            <a:ext cx="336813" cy="318396"/>
+          </a:xfrm>
+        </p:spPr>
+        <p:txBody>
+          <a:bodyPr/>
+          <a:lstStyle/>
+          <a:p>
+            <a:fld id="{86CB4B4D-7CA3-9044-876B-883B54F8677D}" type="slidenum">
+              <a:rPr lang="en-CZ" smtClean="0"/>
+              <a:pPr/>
+              <a:t>4</a:t>
+            </a:fld>
+            <a:endParaRPr lang="en-CZ"/>
+          </a:p>
+        </p:txBody>
+      </p:sp>
+      <p:sp>
+        <p:nvSpPr>
+          <p:cNvPr id="4" name="Text Placeholder 3">
+            <a:extLst>
+              <a:ext uri="{FF2B5EF4-FFF2-40B4-BE49-F238E27FC236}">
+                <a16:creationId xmlns:a16="http://schemas.microsoft.com/office/drawing/2014/main" id="{3EDAA897-42F2-759E-2AF7-F4984F2C2BD4}"/>
+              </a:ext>
+            </a:extLst>
+          </p:cNvPr>
+          <p:cNvSpPr>
+            <a:spLocks noGrp="1"/>
+          </p:cNvSpPr>
+          <p:nvPr>
+            <p:ph type="body" idx="1"/>
+          </p:nvPr>
+        </p:nvSpPr>
+        <p:spPr>
+          <a:xfrm>
+            <a:off x="252000" y="1585914"/>
+            <a:ext cx="7560000" cy="2982962"/>
+          </a:xfrm>
+        </p:spPr>
+        <p:txBody>
+          <a:bodyPr>
+            <a:noAutofit/>
+          </a:bodyPr>
+          <a:lstStyle/>
+          <a:p>
+            <a:pPr algn="just"/>
+            <a:r>
+              <a:rPr lang="cs-CZ" sz="1200" dirty="0"/>
+              <a:t>Lokální ukládání/přepisování dat</a:t>
+            </a:r>
+          </a:p>
+          <a:p>
+            <a:pPr marL="114300" indent="0" algn="just">
+              <a:buNone/>
+            </a:pPr>
+            <a:endParaRPr lang="cs-CZ" sz="1200" dirty="0"/>
+          </a:p>
+        </p:txBody>
+      </p:sp>
+      <p:sp>
+        <p:nvSpPr>
+          <p:cNvPr id="12" name="Zástupný symbol pro zápatí 11">
+            <a:extLst>
+              <a:ext uri="{FF2B5EF4-FFF2-40B4-BE49-F238E27FC236}">
+                <a16:creationId xmlns:a16="http://schemas.microsoft.com/office/drawing/2014/main" id="{A14FCE9D-709F-64D0-A8ED-1AFD0326CC90}"/>
+              </a:ext>
+            </a:extLst>
+          </p:cNvPr>
+          <p:cNvSpPr>
+            <a:spLocks noGrp="1"/>
+          </p:cNvSpPr>
+          <p:nvPr>
+            <p:ph type="ftr" sz="quarter" idx="3"/>
+          </p:nvPr>
+        </p:nvSpPr>
+        <p:spPr>
+          <a:xfrm>
+            <a:off x="251999" y="209500"/>
+            <a:ext cx="7560000" cy="365125"/>
+          </a:xfrm>
+        </p:spPr>
+        <p:txBody>
+          <a:bodyPr/>
+          <a:lstStyle/>
+          <a:p>
+            <a:r>
+              <a:rPr lang="cs-CZ" dirty="0"/>
+              <a:t>Vývoj algoritmu zarovnávání optických elementů s využitím obrazových dat ze zaměřovací kamery interferometru</a:t>
+            </a:r>
+          </a:p>
+        </p:txBody>
+      </p:sp>
+      <p:sp>
+        <p:nvSpPr>
+          <p:cNvPr id="18" name="Zástupný symbol pro datum 17">
+            <a:extLst>
+              <a:ext uri="{FF2B5EF4-FFF2-40B4-BE49-F238E27FC236}">
+                <a16:creationId xmlns:a16="http://schemas.microsoft.com/office/drawing/2014/main" id="{ED091F28-1C78-5AA6-61EF-2071407BE677}"/>
+              </a:ext>
+            </a:extLst>
+          </p:cNvPr>
+          <p:cNvSpPr>
+            <a:spLocks noGrp="1"/>
+          </p:cNvSpPr>
+          <p:nvPr>
+            <p:ph type="dt" sz="half" idx="11"/>
+          </p:nvPr>
+        </p:nvSpPr>
+        <p:spPr/>
+        <p:txBody>
+          <a:bodyPr/>
+          <a:lstStyle/>
+          <a:p>
+            <a:fld id="{9E039954-0893-4AC6-8021-245AB753B716}" type="datetime1">
+              <a:rPr lang="cs-CZ" smtClean="0"/>
+              <a:t>01.04.2026</a:t>
+            </a:fld>
+            <a:endParaRPr lang="cs-CZ" dirty="0"/>
+          </a:p>
+        </p:txBody>
+      </p:sp>
+      <p:pic>
+        <p:nvPicPr>
+          <p:cNvPr id="6" name="Picture 5">
+            <a:extLst>
+              <a:ext uri="{FF2B5EF4-FFF2-40B4-BE49-F238E27FC236}">
+                <a16:creationId xmlns:a16="http://schemas.microsoft.com/office/drawing/2014/main" id="{64676153-CF96-8A15-2911-3A768D5601A3}"/>
+              </a:ext>
+            </a:extLst>
+          </p:cNvPr>
+          <p:cNvPicPr>
+            <a:picLocks noChangeAspect="1"/>
+          </p:cNvPicPr>
+          <p:nvPr/>
+        </p:nvPicPr>
+        <p:blipFill>
+          <a:blip r:embed="rId3"/>
+          <a:stretch>
+            <a:fillRect/>
+          </a:stretch>
+        </p:blipFill>
+        <p:spPr>
+          <a:xfrm>
+            <a:off x="567856" y="3036113"/>
+            <a:ext cx="1713806" cy="1189036"/>
+          </a:xfrm>
+          <a:prstGeom prst="rect">
+            <a:avLst/>
+          </a:prstGeom>
+        </p:spPr>
+      </p:pic>
+      <p:pic>
+        <p:nvPicPr>
+          <p:cNvPr id="9" name="Picture 8">
+            <a:extLst>
+              <a:ext uri="{FF2B5EF4-FFF2-40B4-BE49-F238E27FC236}">
+                <a16:creationId xmlns:a16="http://schemas.microsoft.com/office/drawing/2014/main" id="{05AD61EA-6900-1F93-A3EC-FFDBDADDDB38}"/>
+              </a:ext>
+            </a:extLst>
+          </p:cNvPr>
+          <p:cNvPicPr>
+            <a:picLocks noChangeAspect="1"/>
+          </p:cNvPicPr>
+          <p:nvPr/>
+        </p:nvPicPr>
+        <p:blipFill>
+          <a:blip r:embed="rId4"/>
+          <a:stretch>
+            <a:fillRect/>
+          </a:stretch>
+        </p:blipFill>
+        <p:spPr>
+          <a:xfrm>
+            <a:off x="2281662" y="3036113"/>
+            <a:ext cx="1281066" cy="1189036"/>
+          </a:xfrm>
+          <a:prstGeom prst="rect">
+            <a:avLst/>
+          </a:prstGeom>
+        </p:spPr>
+      </p:pic>
+      <p:pic>
+        <p:nvPicPr>
+          <p:cNvPr id="11" name="Picture 10">
+            <a:extLst>
+              <a:ext uri="{FF2B5EF4-FFF2-40B4-BE49-F238E27FC236}">
+                <a16:creationId xmlns:a16="http://schemas.microsoft.com/office/drawing/2014/main" id="{7D717D8E-7BA3-0D4F-A5EC-5BC59759AAE4}"/>
+              </a:ext>
+            </a:extLst>
+          </p:cNvPr>
+          <p:cNvPicPr>
+            <a:picLocks noChangeAspect="1"/>
+          </p:cNvPicPr>
+          <p:nvPr/>
+        </p:nvPicPr>
+        <p:blipFill>
+          <a:blip r:embed="rId5"/>
+          <a:stretch>
+            <a:fillRect/>
+          </a:stretch>
+        </p:blipFill>
+        <p:spPr>
+          <a:xfrm>
+            <a:off x="3562728" y="3267771"/>
+            <a:ext cx="2018546" cy="958809"/>
+          </a:xfrm>
+          <a:prstGeom prst="rect">
+            <a:avLst/>
+          </a:prstGeom>
+        </p:spPr>
+      </p:pic>
+      <p:pic>
+        <p:nvPicPr>
+          <p:cNvPr id="14" name="Picture 13">
+            <a:extLst>
+              <a:ext uri="{FF2B5EF4-FFF2-40B4-BE49-F238E27FC236}">
+                <a16:creationId xmlns:a16="http://schemas.microsoft.com/office/drawing/2014/main" id="{F1A6B152-7684-66D9-5062-7CBC265434FD}"/>
+              </a:ext>
+            </a:extLst>
+          </p:cNvPr>
+          <p:cNvPicPr>
+            <a:picLocks noChangeAspect="1"/>
+          </p:cNvPicPr>
+          <p:nvPr/>
+        </p:nvPicPr>
+        <p:blipFill>
+          <a:blip r:embed="rId6">
+            <a:extLst>
+              <a:ext uri="{28A0092B-C50C-407E-A947-70E740481C1C}">
+                <a14:useLocalDpi xmlns:a14="http://schemas.microsoft.com/office/drawing/2010/main" val="0"/>
+              </a:ext>
+            </a:extLst>
+          </a:blip>
+          <a:stretch>
+            <a:fillRect/>
+          </a:stretch>
+        </p:blipFill>
+        <p:spPr>
+          <a:xfrm>
+            <a:off x="5740316" y="864679"/>
+            <a:ext cx="2997503" cy="3836140"/>
+          </a:xfrm>
+          <a:prstGeom prst="rect">
+            <a:avLst/>
+          </a:prstGeom>
+        </p:spPr>
+      </p:pic>
+    </p:spTree>
+    <p:extLst>
+      <p:ext uri="{BB962C8B-B14F-4D97-AF65-F5344CB8AC3E}">
+        <p14:creationId xmlns:p14="http://schemas.microsoft.com/office/powerpoint/2010/main" val="928010509"/>
+      </p:ext>
+    </p:extLst>
+  </p:cSld>
+  <p:clrMapOvr>
+    <a:masterClrMapping/>
+  </p:clrMapOvr>
+  <p:transition spd="med"/>
+</p:sld>
+</file>
+
+<file path=ppt/slides/slide5.xml><?xml version="1.0" encoding="utf-8"?>
+<p:sld xmlns:a="http://schemas.openxmlformats.org/drawingml/2006/main" xmlns:r="http://schemas.openxmlformats.org/officeDocument/2006/relationships" xmlns:p="http://schemas.openxmlformats.org/presentationml/2006/main">
+  <p:cSld>
+    <p:spTree>
+      <p:nvGrpSpPr>
+        <p:cNvPr id="1" name="">
+          <a:extLst>
+            <a:ext uri="{FF2B5EF4-FFF2-40B4-BE49-F238E27FC236}">
+              <a16:creationId xmlns:a16="http://schemas.microsoft.com/office/drawing/2014/main" id="{30A47F3B-1AAF-2008-6B22-1F37E5E44950}"/>
+            </a:ext>
+          </a:extLst>
+        </p:cNvPr>
+        <p:cNvGrpSpPr/>
+        <p:nvPr/>
+      </p:nvGrpSpPr>
+      <p:grpSpPr>
+        <a:xfrm>
+          <a:off x="0" y="0"/>
+          <a:ext cx="0" cy="0"/>
+          <a:chOff x="0" y="0"/>
+          <a:chExt cx="0" cy="0"/>
+        </a:xfrm>
+      </p:grpSpPr>
+      <p:sp>
+        <p:nvSpPr>
+          <p:cNvPr id="2" name="Title 1">
+            <a:extLst>
+              <a:ext uri="{FF2B5EF4-FFF2-40B4-BE49-F238E27FC236}">
+                <a16:creationId xmlns:a16="http://schemas.microsoft.com/office/drawing/2014/main" id="{805A89FB-81F8-A536-24AC-A2EBD28D1940}"/>
+              </a:ext>
+            </a:extLst>
+          </p:cNvPr>
+          <p:cNvSpPr>
+            <a:spLocks noGrp="1"/>
+          </p:cNvSpPr>
+          <p:nvPr>
+            <p:ph type="title"/>
+          </p:nvPr>
+        </p:nvSpPr>
+        <p:spPr>
+          <a:xfrm>
+            <a:off x="251999" y="892969"/>
+            <a:ext cx="7560000" cy="560249"/>
+          </a:xfrm>
+        </p:spPr>
+        <p:txBody>
+          <a:bodyPr>
+            <a:noAutofit/>
+          </a:bodyPr>
+          <a:lstStyle/>
+          <a:p>
+            <a:r>
+              <a:rPr lang="cs-CZ" sz="2400" dirty="0"/>
+              <a:t>Referenční snímek</a:t>
+            </a:r>
+          </a:p>
+        </p:txBody>
+      </p:sp>
+      <p:sp>
+        <p:nvSpPr>
+          <p:cNvPr id="3" name="Slide Number Placeholder 2">
+            <a:extLst>
+              <a:ext uri="{FF2B5EF4-FFF2-40B4-BE49-F238E27FC236}">
+                <a16:creationId xmlns:a16="http://schemas.microsoft.com/office/drawing/2014/main" id="{7A8F931A-8936-C876-30F7-1B1DE6D0BC3E}"/>
+              </a:ext>
+            </a:extLst>
+          </p:cNvPr>
+          <p:cNvSpPr>
+            <a:spLocks noGrp="1"/>
+          </p:cNvSpPr>
+          <p:nvPr>
+            <p:ph type="sldNum" sz="quarter" idx="2"/>
+          </p:nvPr>
+        </p:nvSpPr>
+        <p:spPr>
+          <a:xfrm>
+            <a:off x="8684345" y="4700819"/>
+            <a:ext cx="336813" cy="318396"/>
+          </a:xfrm>
+        </p:spPr>
+        <p:txBody>
+          <a:bodyPr/>
+          <a:lstStyle/>
+          <a:p>
+            <a:fld id="{86CB4B4D-7CA3-9044-876B-883B54F8677D}" type="slidenum">
+              <a:rPr lang="en-CZ" smtClean="0"/>
+              <a:pPr/>
+              <a:t>5</a:t>
+            </a:fld>
+            <a:endParaRPr lang="en-CZ"/>
+          </a:p>
+        </p:txBody>
+      </p:sp>
+      <p:sp>
+        <p:nvSpPr>
+          <p:cNvPr id="4" name="Text Placeholder 3">
+            <a:extLst>
+              <a:ext uri="{FF2B5EF4-FFF2-40B4-BE49-F238E27FC236}">
+                <a16:creationId xmlns:a16="http://schemas.microsoft.com/office/drawing/2014/main" id="{06DDBDB4-CFB7-51EE-9A54-78B262D1C84B}"/>
+              </a:ext>
+            </a:extLst>
+          </p:cNvPr>
+          <p:cNvSpPr>
+            <a:spLocks noGrp="1"/>
+          </p:cNvSpPr>
+          <p:nvPr>
+            <p:ph type="body" idx="1"/>
+          </p:nvPr>
+        </p:nvSpPr>
+        <p:spPr>
+          <a:xfrm>
+            <a:off x="252000" y="1481508"/>
+            <a:ext cx="7560000" cy="3104832"/>
+          </a:xfrm>
+        </p:spPr>
+        <p:txBody>
+          <a:bodyPr>
+            <a:noAutofit/>
+          </a:bodyPr>
+          <a:lstStyle/>
+          <a:p>
+            <a:pPr algn="just"/>
+            <a:r>
+              <a:rPr lang="cs-CZ" sz="1200" dirty="0"/>
+              <a:t>Referenční bod = bod blíže ke středu snímku</a:t>
+            </a:r>
+          </a:p>
+          <a:p>
+            <a:pPr algn="just"/>
+            <a:endParaRPr lang="cs-CZ" sz="1200" dirty="0"/>
+          </a:p>
+        </p:txBody>
+      </p:sp>
+      <p:sp>
+        <p:nvSpPr>
+          <p:cNvPr id="12" name="Zástupný symbol pro zápatí 11">
+            <a:extLst>
+              <a:ext uri="{FF2B5EF4-FFF2-40B4-BE49-F238E27FC236}">
+                <a16:creationId xmlns:a16="http://schemas.microsoft.com/office/drawing/2014/main" id="{C7649100-7A61-72C2-7E58-84235A745C4C}"/>
+              </a:ext>
+            </a:extLst>
+          </p:cNvPr>
+          <p:cNvSpPr>
+            <a:spLocks noGrp="1"/>
+          </p:cNvSpPr>
+          <p:nvPr>
+            <p:ph type="ftr" sz="quarter" idx="3"/>
+          </p:nvPr>
+        </p:nvSpPr>
+        <p:spPr>
+          <a:xfrm>
+            <a:off x="251999" y="209500"/>
+            <a:ext cx="7560000" cy="365125"/>
+          </a:xfrm>
+        </p:spPr>
+        <p:txBody>
+          <a:bodyPr/>
+          <a:lstStyle/>
+          <a:p>
+            <a:r>
+              <a:rPr lang="cs-CZ" dirty="0"/>
+              <a:t>Vývoj algoritmu zarovnávání optických elementů s využitím obrazových dat ze zaměřovací kamery interferometru</a:t>
+            </a:r>
+          </a:p>
+        </p:txBody>
+      </p:sp>
+      <p:sp>
+        <p:nvSpPr>
+          <p:cNvPr id="18" name="Zástupný symbol pro datum 17">
+            <a:extLst>
+              <a:ext uri="{FF2B5EF4-FFF2-40B4-BE49-F238E27FC236}">
+                <a16:creationId xmlns:a16="http://schemas.microsoft.com/office/drawing/2014/main" id="{F9C076F9-7A61-3993-4F64-082B25E01006}"/>
+              </a:ext>
+            </a:extLst>
+          </p:cNvPr>
+          <p:cNvSpPr>
+            <a:spLocks noGrp="1"/>
+          </p:cNvSpPr>
+          <p:nvPr>
+            <p:ph type="dt" sz="half" idx="11"/>
+          </p:nvPr>
+        </p:nvSpPr>
+        <p:spPr/>
+        <p:txBody>
+          <a:bodyPr/>
+          <a:lstStyle/>
+          <a:p>
+            <a:fld id="{9E039954-0893-4AC6-8021-245AB753B716}" type="datetime1">
+              <a:rPr lang="cs-CZ" smtClean="0"/>
+              <a:t>01.04.2026</a:t>
+            </a:fld>
+            <a:endParaRPr lang="cs-CZ" dirty="0"/>
+          </a:p>
+        </p:txBody>
+      </p:sp>
+      <p:pic>
+        <p:nvPicPr>
+          <p:cNvPr id="7" name="Picture 6">
+            <a:extLst>
+              <a:ext uri="{FF2B5EF4-FFF2-40B4-BE49-F238E27FC236}">
+                <a16:creationId xmlns:a16="http://schemas.microsoft.com/office/drawing/2014/main" id="{ABA552A4-446B-9E0C-2C9B-FD37D7B3C96E}"/>
+              </a:ext>
+            </a:extLst>
+          </p:cNvPr>
+          <p:cNvPicPr>
+            <a:picLocks noChangeAspect="1"/>
+          </p:cNvPicPr>
+          <p:nvPr/>
+        </p:nvPicPr>
+        <p:blipFill>
+          <a:blip r:embed="rId2">
+            <a:extLst>
+              <a:ext uri="{28A0092B-C50C-407E-A947-70E740481C1C}">
+                <a14:useLocalDpi xmlns:a14="http://schemas.microsoft.com/office/drawing/2010/main" val="0"/>
+              </a:ext>
+            </a:extLst>
+          </a:blip>
+          <a:stretch>
+            <a:fillRect/>
+          </a:stretch>
+        </p:blipFill>
+        <p:spPr>
+          <a:xfrm>
+            <a:off x="5740316" y="864679"/>
+            <a:ext cx="2997503" cy="3836140"/>
+          </a:xfrm>
+          <a:prstGeom prst="rect">
+            <a:avLst/>
+          </a:prstGeom>
+        </p:spPr>
+      </p:pic>
+      <p:pic>
+        <p:nvPicPr>
+          <p:cNvPr id="6" name="Picture 5">
+            <a:extLst>
+              <a:ext uri="{FF2B5EF4-FFF2-40B4-BE49-F238E27FC236}">
+                <a16:creationId xmlns:a16="http://schemas.microsoft.com/office/drawing/2014/main" id="{679F0BB5-17A1-4C88-8A9C-BAD27A746727}"/>
+              </a:ext>
+            </a:extLst>
+          </p:cNvPr>
+          <p:cNvPicPr>
+            <a:picLocks noChangeAspect="1"/>
+          </p:cNvPicPr>
+          <p:nvPr/>
+        </p:nvPicPr>
+        <p:blipFill>
+          <a:blip r:embed="rId3">
+            <a:extLst>
+              <a:ext uri="{28A0092B-C50C-407E-A947-70E740481C1C}">
+                <a14:useLocalDpi xmlns:a14="http://schemas.microsoft.com/office/drawing/2010/main" val="0"/>
+              </a:ext>
+            </a:extLst>
+          </a:blip>
+          <a:stretch>
+            <a:fillRect/>
+          </a:stretch>
+        </p:blipFill>
+        <p:spPr>
+          <a:xfrm>
+            <a:off x="5740315" y="864677"/>
+            <a:ext cx="2997504" cy="3836142"/>
+          </a:xfrm>
+          <a:prstGeom prst="rect">
+            <a:avLst/>
+          </a:prstGeom>
+        </p:spPr>
+      </p:pic>
+      <p:pic>
+        <p:nvPicPr>
+          <p:cNvPr id="14" name="Picture 13">
+            <a:extLst>
+              <a:ext uri="{FF2B5EF4-FFF2-40B4-BE49-F238E27FC236}">
+                <a16:creationId xmlns:a16="http://schemas.microsoft.com/office/drawing/2014/main" id="{27C039FE-6110-C69B-D6EF-A75C53E00D92}"/>
+              </a:ext>
+            </a:extLst>
+          </p:cNvPr>
+          <p:cNvPicPr>
+            <a:picLocks noChangeAspect="1"/>
+          </p:cNvPicPr>
+          <p:nvPr/>
+        </p:nvPicPr>
+        <p:blipFill>
+          <a:blip r:embed="rId4"/>
+          <a:stretch>
+            <a:fillRect/>
+          </a:stretch>
+        </p:blipFill>
+        <p:spPr>
+          <a:xfrm>
+            <a:off x="445912" y="2425513"/>
+            <a:ext cx="2257740" cy="1848108"/>
+          </a:xfrm>
+          <a:prstGeom prst="rect">
+            <a:avLst/>
+          </a:prstGeom>
+        </p:spPr>
+      </p:pic>
+      <p:sp>
+        <p:nvSpPr>
+          <p:cNvPr id="20" name="TextBox 19">
+            <a:extLst>
+              <a:ext uri="{FF2B5EF4-FFF2-40B4-BE49-F238E27FC236}">
+                <a16:creationId xmlns:a16="http://schemas.microsoft.com/office/drawing/2014/main" id="{6B284BEE-09B2-4F7D-58ED-A1534CBD2418}"/>
+              </a:ext>
+            </a:extLst>
+          </p:cNvPr>
+          <p:cNvSpPr txBox="1"/>
+          <p:nvPr/>
+        </p:nvSpPr>
+        <p:spPr>
+          <a:xfrm flipH="1">
+            <a:off x="445912" y="2089446"/>
+            <a:ext cx="3177468" cy="307777"/>
+          </a:xfrm>
+          <a:prstGeom prst="rect">
+            <a:avLst/>
+          </a:prstGeom>
+          <a:noFill/>
+          <a:ln w="12700" cap="flat">
+            <a:noFill/>
+            <a:miter lim="400000"/>
+          </a:ln>
+          <a:effectLst/>
+          <a:sp3d/>
+        </p:spPr>
+        <p:style>
+          <a:lnRef idx="0">
+            <a:scrgbClr r="0" g="0" b="0"/>
+          </a:lnRef>
+          <a:fillRef idx="0">
+            <a:scrgbClr r="0" g="0" b="0"/>
+          </a:fillRef>
+          <a:effectRef idx="0">
+            <a:scrgbClr r="0" g="0" b="0"/>
+          </a:effectRef>
+          <a:fontRef idx="none"/>
+        </p:style>
+        <p:txBody>
+          <a:bodyPr rot="0" spcFirstLastPara="1" vertOverflow="overflow" horzOverflow="overflow" vert="horz" wrap="square" lIns="0" tIns="0" rIns="0" bIns="0" numCol="1" spcCol="38100" rtlCol="0" anchor="t">
+            <a:spAutoFit/>
+          </a:bodyPr>
+          <a:lstStyle/>
+          <a:p>
+            <a:r>
+              <a:rPr lang="cs-CZ" sz="1000" dirty="0"/>
+              <a:t>Návratový paprsky</a:t>
+            </a:r>
+          </a:p>
+          <a:p>
+            <a:pPr marL="0" marR="0" indent="0" algn="l" defTabSz="914400" rtl="0" fontAlgn="auto" latinLnBrk="0" hangingPunct="0">
+              <a:lnSpc>
+                <a:spcPct val="100000"/>
+              </a:lnSpc>
+              <a:spcBef>
+                <a:spcPts val="0"/>
+              </a:spcBef>
+              <a:spcAft>
+                <a:spcPts val="0"/>
+              </a:spcAft>
+              <a:buClrTx/>
+              <a:buSzTx/>
+              <a:buFontTx/>
+              <a:buNone/>
+              <a:tabLst/>
+            </a:pPr>
+            <a:r>
+              <a:rPr kumimoji="0" lang="cs-CZ" sz="1000" b="0" i="0" u="none" strike="noStrike" cap="none" spc="0" normalizeH="0" baseline="0" dirty="0">
+                <a:ln>
+                  <a:noFill/>
+                </a:ln>
+                <a:solidFill>
+                  <a:srgbClr val="000000"/>
+                </a:solidFill>
+                <a:effectLst/>
+                <a:uFillTx/>
+                <a:latin typeface="+mn-lt"/>
+                <a:ea typeface="+mn-ea"/>
+                <a:cs typeface="+mn-cs"/>
+                <a:sym typeface="Arial"/>
+              </a:rPr>
+              <a:t>S referenčním a parazitním bodem</a:t>
+            </a:r>
+          </a:p>
+        </p:txBody>
+      </p:sp>
+    </p:spTree>
+    <p:extLst>
+      <p:ext uri="{BB962C8B-B14F-4D97-AF65-F5344CB8AC3E}">
+        <p14:creationId xmlns:p14="http://schemas.microsoft.com/office/powerpoint/2010/main" val="224075384"/>
       </p:ext>
     </p:extLst>
   </p:cSld>
@@ -4556,7 +4673,7 @@
         <p:cNvPr id="1" name="">
           <a:extLst>
             <a:ext uri="{FF2B5EF4-FFF2-40B4-BE49-F238E27FC236}">
-              <a16:creationId xmlns:a16="http://schemas.microsoft.com/office/drawing/2014/main" id="{756B84C1-52FF-B5DE-0ACD-12A107561F74}"/>
+              <a16:creationId xmlns:a16="http://schemas.microsoft.com/office/drawing/2014/main" id="{44133FF1-13DD-FDE2-FABD-27A825C82245}"/>
             </a:ext>
           </a:extLst>
         </p:cNvPr>
@@ -4576,7 +4693,7 @@
           <p:cNvPr id="2" name="Title 1">
             <a:extLst>
               <a:ext uri="{FF2B5EF4-FFF2-40B4-BE49-F238E27FC236}">
-                <a16:creationId xmlns:a16="http://schemas.microsoft.com/office/drawing/2014/main" id="{E6F33E9D-9A48-90E1-0E96-3B7E9CB10E57}"/>
+                <a16:creationId xmlns:a16="http://schemas.microsoft.com/office/drawing/2014/main" id="{D592D284-948F-8DD0-06CF-BCA08607777B}"/>
               </a:ext>
             </a:extLst>
           </p:cNvPr>
@@ -4601,7 +4718,7 @@
           <a:p>
             <a:r>
               <a:rPr lang="cs-CZ" sz="2400" dirty="0"/>
-              <a:t>Implementace detekčního algoritmu</a:t>
+              <a:t>Snímek se vzorkem</a:t>
             </a:r>
           </a:p>
         </p:txBody>
@@ -4611,7 +4728,7 @@
           <p:cNvPr id="3" name="Slide Number Placeholder 2">
             <a:extLst>
               <a:ext uri="{FF2B5EF4-FFF2-40B4-BE49-F238E27FC236}">
-                <a16:creationId xmlns:a16="http://schemas.microsoft.com/office/drawing/2014/main" id="{5561F9A1-CE4C-ED1C-53A0-202EB33B4B69}"/>
+                <a16:creationId xmlns:a16="http://schemas.microsoft.com/office/drawing/2014/main" id="{0B26DADA-1A39-132E-8362-AFA4832CB324}"/>
               </a:ext>
             </a:extLst>
           </p:cNvPr>
@@ -4646,7 +4763,7 @@
           <p:cNvPr id="4" name="Text Placeholder 3">
             <a:extLst>
               <a:ext uri="{FF2B5EF4-FFF2-40B4-BE49-F238E27FC236}">
-                <a16:creationId xmlns:a16="http://schemas.microsoft.com/office/drawing/2014/main" id="{F510C7D1-E3AB-E79E-2011-229855800325}"/>
+                <a16:creationId xmlns:a16="http://schemas.microsoft.com/office/drawing/2014/main" id="{59D2BFFD-FC02-E61A-689D-4445744448F2}"/>
               </a:ext>
             </a:extLst>
           </p:cNvPr>
@@ -4671,9 +4788,22 @@
           <a:p>
             <a:pPr algn="just"/>
             <a:r>
-              <a:rPr lang="cs-CZ" dirty="0"/>
-              <a:t>Implementace pro osy x,y</a:t>
+              <a:rPr lang="cs-CZ" sz="1200" dirty="0"/>
+              <a:t>Posuzuje se na základě vyhodnocení nového snímku, do jakého stavu</a:t>
             </a:r>
+          </a:p>
+          <a:p>
+            <a:pPr marL="114300" indent="0" algn="just">
+              <a:buNone/>
+            </a:pPr>
+            <a:r>
+              <a:rPr lang="cs-CZ" sz="1200" dirty="0"/>
+              <a:t>se má algoritmus posunout</a:t>
+            </a:r>
+          </a:p>
+          <a:p>
+            <a:pPr algn="just"/>
+            <a:endParaRPr lang="cs-CZ" sz="1200" dirty="0"/>
           </a:p>
         </p:txBody>
       </p:sp>
@@ -4682,7 +4812,7 @@
           <p:cNvPr id="12" name="Zástupný symbol pro zápatí 11">
             <a:extLst>
               <a:ext uri="{FF2B5EF4-FFF2-40B4-BE49-F238E27FC236}">
-                <a16:creationId xmlns:a16="http://schemas.microsoft.com/office/drawing/2014/main" id="{4A628850-A001-E080-FAF6-9434E587D496}"/>
+                <a16:creationId xmlns:a16="http://schemas.microsoft.com/office/drawing/2014/main" id="{0DE2640D-4880-B6F0-6AA3-B6FD54C99F70}"/>
               </a:ext>
             </a:extLst>
           </p:cNvPr>
@@ -4715,7 +4845,7 @@
           <p:cNvPr id="18" name="Zástupný symbol pro datum 17">
             <a:extLst>
               <a:ext uri="{FF2B5EF4-FFF2-40B4-BE49-F238E27FC236}">
-                <a16:creationId xmlns:a16="http://schemas.microsoft.com/office/drawing/2014/main" id="{87EC3219-D763-6F5B-6124-9D3E6D44A593}"/>
+                <a16:creationId xmlns:a16="http://schemas.microsoft.com/office/drawing/2014/main" id="{D49DE153-6846-4467-0486-DB077080E3A7}"/>
               </a:ext>
             </a:extLst>
           </p:cNvPr>
@@ -4733,7 +4863,7 @@
           <a:p>
             <a:fld id="{9E039954-0893-4AC6-8021-245AB753B716}" type="datetime1">
               <a:rPr lang="cs-CZ" smtClean="0"/>
-              <a:t>18.02.2026</a:t>
+              <a:t>01.04.2026</a:t>
             </a:fld>
             <a:endParaRPr lang="cs-CZ" dirty="0"/>
           </a:p>
@@ -4744,7 +4874,7 @@
           <p:cNvPr id="7" name="Picture 6">
             <a:extLst>
               <a:ext uri="{FF2B5EF4-FFF2-40B4-BE49-F238E27FC236}">
-                <a16:creationId xmlns:a16="http://schemas.microsoft.com/office/drawing/2014/main" id="{E7B441F0-5733-7CFB-6841-769B26E51A33}"/>
+                <a16:creationId xmlns:a16="http://schemas.microsoft.com/office/drawing/2014/main" id="{C772D897-E0DF-807F-F8B2-0A5A1C63CB40}"/>
               </a:ext>
             </a:extLst>
           </p:cNvPr>
@@ -4754,15 +4884,21 @@
           <p:nvPr/>
         </p:nvPicPr>
         <p:blipFill>
-          <a:blip r:embed="rId3"/>
+          <a:blip r:embed="rId2">
+            <a:extLst>
+              <a:ext uri="{28A0092B-C50C-407E-A947-70E740481C1C}">
+                <a14:useLocalDpi xmlns:a14="http://schemas.microsoft.com/office/drawing/2010/main" val="0"/>
+              </a:ext>
+            </a:extLst>
+          </a:blip>
           <a:stretch>
             <a:fillRect/>
           </a:stretch>
         </p:blipFill>
         <p:spPr>
           <a:xfrm>
-            <a:off x="291249" y="2239077"/>
-            <a:ext cx="2657846" cy="1676634"/>
+            <a:off x="5740316" y="864679"/>
+            <a:ext cx="2997503" cy="3836140"/>
           </a:xfrm>
           <a:prstGeom prst="rect">
             <a:avLst/>
@@ -4771,10 +4907,10 @@
       </p:pic>
       <p:pic>
         <p:nvPicPr>
-          <p:cNvPr id="9" name="Picture 8">
-            <a:extLst>
-              <a:ext uri="{FF2B5EF4-FFF2-40B4-BE49-F238E27FC236}">
-                <a16:creationId xmlns:a16="http://schemas.microsoft.com/office/drawing/2014/main" id="{35AAA99B-8D72-97FF-62CF-C0CBE9BE7A45}"/>
+          <p:cNvPr id="6" name="Picture 5">
+            <a:extLst>
+              <a:ext uri="{FF2B5EF4-FFF2-40B4-BE49-F238E27FC236}">
+                <a16:creationId xmlns:a16="http://schemas.microsoft.com/office/drawing/2014/main" id="{C2E871D3-0C58-4847-787F-0C0D2C906EDA}"/>
               </a:ext>
             </a:extLst>
           </p:cNvPr>
@@ -4784,15 +4920,21 @@
           <p:nvPr/>
         </p:nvPicPr>
         <p:blipFill>
-          <a:blip r:embed="rId4"/>
+          <a:blip r:embed="rId3">
+            <a:extLst>
+              <a:ext uri="{28A0092B-C50C-407E-A947-70E740481C1C}">
+                <a14:useLocalDpi xmlns:a14="http://schemas.microsoft.com/office/drawing/2010/main" val="0"/>
+              </a:ext>
+            </a:extLst>
+          </a:blip>
           <a:stretch>
             <a:fillRect/>
           </a:stretch>
         </p:blipFill>
         <p:spPr>
           <a:xfrm>
-            <a:off x="3239493" y="2239077"/>
-            <a:ext cx="2930808" cy="1676634"/>
+            <a:off x="5740315" y="864677"/>
+            <a:ext cx="2997504" cy="3836142"/>
           </a:xfrm>
           <a:prstGeom prst="rect">
             <a:avLst/>
@@ -4801,10 +4943,10 @@
       </p:pic>
       <p:pic>
         <p:nvPicPr>
-          <p:cNvPr id="11" name="Picture 10">
-            <a:extLst>
-              <a:ext uri="{FF2B5EF4-FFF2-40B4-BE49-F238E27FC236}">
-                <a16:creationId xmlns:a16="http://schemas.microsoft.com/office/drawing/2014/main" id="{0C30D22F-4B8B-C9F0-1C28-130294116681}"/>
+          <p:cNvPr id="8" name="Picture 7">
+            <a:extLst>
+              <a:ext uri="{FF2B5EF4-FFF2-40B4-BE49-F238E27FC236}">
+                <a16:creationId xmlns:a16="http://schemas.microsoft.com/office/drawing/2014/main" id="{9BA47E71-FE18-AF26-449A-F59C0F059F8E}"/>
               </a:ext>
             </a:extLst>
           </p:cNvPr>
@@ -4814,7 +4956,7 @@
           <p:nvPr/>
         </p:nvPicPr>
         <p:blipFill>
-          <a:blip r:embed="rId5">
+          <a:blip r:embed="rId4">
             <a:extLst>
               <a:ext uri="{28A0092B-C50C-407E-A947-70E740481C1C}">
                 <a14:useLocalDpi xmlns:a14="http://schemas.microsoft.com/office/drawing/2010/main" val="0"/>
@@ -4827,18 +4969,242 @@
         </p:blipFill>
         <p:spPr>
           <a:xfrm>
-            <a:off x="6460699" y="1881368"/>
-            <a:ext cx="2392052" cy="2392052"/>
+            <a:off x="5740316" y="864680"/>
+            <a:ext cx="2997503" cy="3836139"/>
           </a:xfrm>
           <a:prstGeom prst="rect">
             <a:avLst/>
           </a:prstGeom>
         </p:spPr>
       </p:pic>
+      <p:pic>
+        <p:nvPicPr>
+          <p:cNvPr id="10" name="Picture 9">
+            <a:extLst>
+              <a:ext uri="{FF2B5EF4-FFF2-40B4-BE49-F238E27FC236}">
+                <a16:creationId xmlns:a16="http://schemas.microsoft.com/office/drawing/2014/main" id="{26471230-C435-A657-6202-38CD9D908401}"/>
+              </a:ext>
+            </a:extLst>
+          </p:cNvPr>
+          <p:cNvPicPr>
+            <a:picLocks noChangeAspect="1"/>
+          </p:cNvPicPr>
+          <p:nvPr/>
+        </p:nvPicPr>
+        <p:blipFill>
+          <a:blip r:embed="rId5"/>
+          <a:stretch>
+            <a:fillRect/>
+          </a:stretch>
+        </p:blipFill>
+        <p:spPr>
+          <a:xfrm>
+            <a:off x="3125690" y="2393194"/>
+            <a:ext cx="2134551" cy="1857337"/>
+          </a:xfrm>
+          <a:prstGeom prst="rect">
+            <a:avLst/>
+          </a:prstGeom>
+        </p:spPr>
+      </p:pic>
+      <p:pic>
+        <p:nvPicPr>
+          <p:cNvPr id="13" name="Picture 12">
+            <a:extLst>
+              <a:ext uri="{FF2B5EF4-FFF2-40B4-BE49-F238E27FC236}">
+                <a16:creationId xmlns:a16="http://schemas.microsoft.com/office/drawing/2014/main" id="{53166C56-764A-9B0D-BAA9-6623215A8DF5}"/>
+              </a:ext>
+            </a:extLst>
+          </p:cNvPr>
+          <p:cNvPicPr>
+            <a:picLocks noChangeAspect="1"/>
+          </p:cNvPicPr>
+          <p:nvPr/>
+        </p:nvPicPr>
+        <p:blipFill>
+          <a:blip r:embed="rId6"/>
+          <a:stretch>
+            <a:fillRect/>
+          </a:stretch>
+        </p:blipFill>
+        <p:spPr>
+          <a:xfrm>
+            <a:off x="343341" y="2379381"/>
+            <a:ext cx="2183008" cy="1871150"/>
+          </a:xfrm>
+          <a:prstGeom prst="rect">
+            <a:avLst/>
+          </a:prstGeom>
+        </p:spPr>
+      </p:pic>
+      <p:sp>
+        <p:nvSpPr>
+          <p:cNvPr id="14" name="TextBox 13">
+            <a:extLst>
+              <a:ext uri="{FF2B5EF4-FFF2-40B4-BE49-F238E27FC236}">
+                <a16:creationId xmlns:a16="http://schemas.microsoft.com/office/drawing/2014/main" id="{B0B1C08C-2586-6061-188B-52CDD967A468}"/>
+              </a:ext>
+            </a:extLst>
+          </p:cNvPr>
+          <p:cNvSpPr txBox="1"/>
+          <p:nvPr/>
+        </p:nvSpPr>
+        <p:spPr>
+          <a:xfrm>
+            <a:off x="3098800" y="2146528"/>
+            <a:ext cx="1473200" cy="215444"/>
+          </a:xfrm>
+          <a:prstGeom prst="rect">
+            <a:avLst/>
+          </a:prstGeom>
+          <a:noFill/>
+          <a:ln w="12700" cap="flat">
+            <a:noFill/>
+            <a:miter lim="400000"/>
+          </a:ln>
+          <a:effectLst/>
+          <a:sp3d/>
+        </p:spPr>
+        <p:style>
+          <a:lnRef idx="0">
+            <a:scrgbClr r="0" g="0" b="0"/>
+          </a:lnRef>
+          <a:fillRef idx="0">
+            <a:scrgbClr r="0" g="0" b="0"/>
+          </a:fillRef>
+          <a:effectRef idx="0">
+            <a:scrgbClr r="0" g="0" b="0"/>
+          </a:effectRef>
+          <a:fontRef idx="none"/>
+        </p:style>
+        <p:txBody>
+          <a:bodyPr rot="0" spcFirstLastPara="1" vertOverflow="overflow" horzOverflow="overflow" vert="horz" wrap="square" lIns="0" tIns="0" rIns="0" bIns="0" numCol="1" spcCol="38100" rtlCol="0" anchor="t">
+            <a:spAutoFit/>
+          </a:bodyPr>
+          <a:lstStyle/>
+          <a:p>
+            <a:pPr marL="0" marR="0" indent="0" algn="l" defTabSz="914400" rtl="0" fontAlgn="auto" latinLnBrk="0" hangingPunct="0">
+              <a:lnSpc>
+                <a:spcPct val="100000"/>
+              </a:lnSpc>
+              <a:spcBef>
+                <a:spcPts val="0"/>
+              </a:spcBef>
+              <a:spcAft>
+                <a:spcPts val="0"/>
+              </a:spcAft>
+              <a:buClrTx/>
+              <a:buSzTx/>
+              <a:buFontTx/>
+              <a:buNone/>
+              <a:tabLst/>
+            </a:pPr>
+            <a:r>
+              <a:rPr kumimoji="0" lang="cs-CZ" sz="1400" b="0" i="0" u="none" strike="noStrike" cap="none" spc="0" normalizeH="0" baseline="0" dirty="0">
+                <a:ln>
+                  <a:noFill/>
+                </a:ln>
+                <a:solidFill>
+                  <a:srgbClr val="000000"/>
+                </a:solidFill>
+                <a:effectLst/>
+                <a:uFillTx/>
+                <a:latin typeface="+mn-lt"/>
+                <a:ea typeface="+mn-ea"/>
+                <a:cs typeface="+mn-cs"/>
+                <a:sym typeface="Arial"/>
+              </a:rPr>
+              <a:t>CF Z -30</a:t>
+            </a:r>
+          </a:p>
+        </p:txBody>
+      </p:sp>
+      <p:sp>
+        <p:nvSpPr>
+          <p:cNvPr id="15" name="TextBox 14">
+            <a:extLst>
+              <a:ext uri="{FF2B5EF4-FFF2-40B4-BE49-F238E27FC236}">
+                <a16:creationId xmlns:a16="http://schemas.microsoft.com/office/drawing/2014/main" id="{35AB8141-DE41-42FC-84A8-5B675D961048}"/>
+              </a:ext>
+            </a:extLst>
+          </p:cNvPr>
+          <p:cNvSpPr txBox="1"/>
+          <p:nvPr/>
+        </p:nvSpPr>
+        <p:spPr>
+          <a:xfrm>
+            <a:off x="343341" y="2146528"/>
+            <a:ext cx="673100" cy="215444"/>
+          </a:xfrm>
+          <a:prstGeom prst="rect">
+            <a:avLst/>
+          </a:prstGeom>
+          <a:noFill/>
+          <a:ln w="12700" cap="flat">
+            <a:noFill/>
+            <a:miter lim="400000"/>
+          </a:ln>
+          <a:effectLst/>
+          <a:sp3d/>
+        </p:spPr>
+        <p:style>
+          <a:lnRef idx="0">
+            <a:scrgbClr r="0" g="0" b="0"/>
+          </a:lnRef>
+          <a:fillRef idx="0">
+            <a:scrgbClr r="0" g="0" b="0"/>
+          </a:fillRef>
+          <a:effectRef idx="0">
+            <a:scrgbClr r="0" g="0" b="0"/>
+          </a:effectRef>
+          <a:fontRef idx="none"/>
+        </p:style>
+        <p:txBody>
+          <a:bodyPr rot="0" spcFirstLastPara="1" vertOverflow="overflow" horzOverflow="overflow" vert="horz" wrap="square" lIns="0" tIns="0" rIns="0" bIns="0" numCol="1" spcCol="38100" rtlCol="0" anchor="t">
+            <a:spAutoFit/>
+          </a:bodyPr>
+          <a:lstStyle/>
+          <a:p>
+            <a:pPr marL="0" marR="0" indent="0" algn="l" defTabSz="914400" rtl="0" fontAlgn="auto" latinLnBrk="0" hangingPunct="0">
+              <a:lnSpc>
+                <a:spcPct val="100000"/>
+              </a:lnSpc>
+              <a:spcBef>
+                <a:spcPts val="0"/>
+              </a:spcBef>
+              <a:spcAft>
+                <a:spcPts val="0"/>
+              </a:spcAft>
+              <a:buClrTx/>
+              <a:buSzTx/>
+              <a:buFontTx/>
+              <a:buNone/>
+              <a:tabLst/>
+            </a:pPr>
+            <a:r>
+              <a:rPr kumimoji="0" lang="cs-CZ" sz="1400" b="0" i="0" u="none" strike="noStrike" cap="none" spc="0" normalizeH="0" baseline="0" dirty="0">
+                <a:ln>
+                  <a:noFill/>
+                </a:ln>
+                <a:solidFill>
+                  <a:srgbClr val="000000"/>
+                </a:solidFill>
+                <a:effectLst/>
+                <a:uFillTx/>
+                <a:latin typeface="+mn-lt"/>
+                <a:ea typeface="+mn-ea"/>
+                <a:cs typeface="+mn-cs"/>
+                <a:sym typeface="Arial"/>
+              </a:rPr>
+              <a:t>CF Z -1</a:t>
+            </a:r>
+          </a:p>
+        </p:txBody>
+      </p:sp>
     </p:spTree>
     <p:extLst>
       <p:ext uri="{BB962C8B-B14F-4D97-AF65-F5344CB8AC3E}">
-        <p14:creationId xmlns:p14="http://schemas.microsoft.com/office/powerpoint/2010/main" val="1771376586"/>
+        <p14:creationId xmlns:p14="http://schemas.microsoft.com/office/powerpoint/2010/main" val="675972973"/>
       </p:ext>
     </p:extLst>
   </p:cSld>
@@ -4857,7 +5223,7 @@
         <p:cNvPr id="1" name="">
           <a:extLst>
             <a:ext uri="{FF2B5EF4-FFF2-40B4-BE49-F238E27FC236}">
-              <a16:creationId xmlns:a16="http://schemas.microsoft.com/office/drawing/2014/main" id="{D598124B-640B-819D-35C7-4CFFD63EC545}"/>
+              <a16:creationId xmlns:a16="http://schemas.microsoft.com/office/drawing/2014/main" id="{8FCEC94B-57E0-10F7-8F8E-DED22AFFF168}"/>
             </a:ext>
           </a:extLst>
         </p:cNvPr>
@@ -4877,7 +5243,7 @@
           <p:cNvPr id="2" name="Title 1">
             <a:extLst>
               <a:ext uri="{FF2B5EF4-FFF2-40B4-BE49-F238E27FC236}">
-                <a16:creationId xmlns:a16="http://schemas.microsoft.com/office/drawing/2014/main" id="{46D653B9-15D5-7A06-42F2-9DEBA847FF1A}"/>
+                <a16:creationId xmlns:a16="http://schemas.microsoft.com/office/drawing/2014/main" id="{90D6CD61-1257-8B96-ABEC-148949B57A53}"/>
               </a:ext>
             </a:extLst>
           </p:cNvPr>
@@ -4902,7 +5268,7 @@
           <a:p>
             <a:r>
               <a:rPr lang="cs-CZ" sz="2400" dirty="0"/>
-              <a:t>Implementace detekčního algoritmu</a:t>
+              <a:t>Posun po osách x,y</a:t>
             </a:r>
           </a:p>
         </p:txBody>
@@ -4912,7 +5278,7 @@
           <p:cNvPr id="3" name="Slide Number Placeholder 2">
             <a:extLst>
               <a:ext uri="{FF2B5EF4-FFF2-40B4-BE49-F238E27FC236}">
-                <a16:creationId xmlns:a16="http://schemas.microsoft.com/office/drawing/2014/main" id="{47CE6DFA-11E6-4089-BA2A-6F13D544C5C8}"/>
+                <a16:creationId xmlns:a16="http://schemas.microsoft.com/office/drawing/2014/main" id="{8C16CB8B-CFAA-A78E-3314-F785FF261A88}"/>
               </a:ext>
             </a:extLst>
           </p:cNvPr>
@@ -4942,14 +5308,475 @@
           </a:p>
         </p:txBody>
       </p:sp>
-      <mc:AlternateContent xmlns:mc="http://schemas.openxmlformats.org/markup-compatibility/2006" xmlns:a14="http://schemas.microsoft.com/office/drawing/2010/main">
-        <mc:Choice Requires="a14">
+      <p:sp>
+        <p:nvSpPr>
+          <p:cNvPr id="4" name="Text Placeholder 3">
+            <a:extLst>
+              <a:ext uri="{FF2B5EF4-FFF2-40B4-BE49-F238E27FC236}">
+                <a16:creationId xmlns:a16="http://schemas.microsoft.com/office/drawing/2014/main" id="{626B9F51-58D1-D3E6-023E-09019F803A5F}"/>
+              </a:ext>
+            </a:extLst>
+          </p:cNvPr>
+          <p:cNvSpPr>
+            <a:spLocks noGrp="1"/>
+          </p:cNvSpPr>
+          <p:nvPr>
+            <p:ph type="body" idx="1"/>
+          </p:nvPr>
+        </p:nvSpPr>
+        <p:spPr>
+          <a:xfrm>
+            <a:off x="252000" y="1585914"/>
+            <a:ext cx="7560000" cy="2982962"/>
+          </a:xfrm>
+        </p:spPr>
+        <p:txBody>
+          <a:bodyPr>
+            <a:noAutofit/>
+          </a:bodyPr>
+          <a:lstStyle/>
+          <a:p>
+            <a:pPr marL="114300" indent="0" algn="just">
+              <a:buSzPct val="100000"/>
+              <a:buNone/>
+            </a:pPr>
+            <a:r>
+              <a:rPr lang="cs-CZ" sz="1200" b="1" dirty="0"/>
+              <a:t>Problémy:</a:t>
+            </a:r>
+          </a:p>
+          <a:p>
+            <a:pPr marL="114300" indent="0" algn="just">
+              <a:buSzPct val="100000"/>
+              <a:buNone/>
+            </a:pPr>
+            <a:r>
+              <a:rPr lang="cs-CZ" sz="1200" dirty="0"/>
+              <a:t>1. Vzorek je mimo snímek</a:t>
+            </a:r>
+          </a:p>
+          <a:p>
+            <a:pPr marL="114300" indent="0" algn="just">
+              <a:buSzPct val="100000"/>
+              <a:buNone/>
+            </a:pPr>
+            <a:r>
+              <a:rPr lang="cs-CZ" sz="1200" dirty="0"/>
+              <a:t>2. Na okraji snímku</a:t>
+            </a:r>
+          </a:p>
+          <a:p>
+            <a:pPr marL="114300" indent="0" algn="just">
+              <a:buSzPct val="100000"/>
+              <a:buNone/>
+            </a:pPr>
+            <a:r>
+              <a:rPr lang="cs-CZ" sz="1200" dirty="0"/>
+              <a:t>3. Překrývá/dotýtá se </a:t>
+            </a:r>
+          </a:p>
+          <a:p>
+            <a:pPr marL="114300" indent="0" algn="just">
+              <a:buSzPct val="100000"/>
+              <a:buNone/>
+            </a:pPr>
+            <a:r>
+              <a:rPr lang="cs-CZ" sz="1200" dirty="0"/>
+              <a:t>    referenčního/parazitního bodu</a:t>
+            </a:r>
+          </a:p>
+          <a:p>
+            <a:pPr marL="114300" indent="0" algn="just">
+              <a:buSzPct val="100000"/>
+              <a:buNone/>
+            </a:pPr>
+            <a:r>
+              <a:rPr lang="cs-CZ" sz="1200" dirty="0"/>
+              <a:t>4. Na snímku je více bodů </a:t>
+            </a:r>
+          </a:p>
+          <a:p>
+            <a:pPr marL="114300" indent="0" algn="just">
+              <a:buSzPct val="100000"/>
+              <a:buNone/>
+            </a:pPr>
+            <a:r>
+              <a:rPr lang="cs-CZ" sz="1200" dirty="0"/>
+              <a:t>    (špatná filtrace obrazu)</a:t>
+            </a:r>
+          </a:p>
+          <a:p>
+            <a:pPr marL="114300" indent="0" algn="just">
+              <a:buSzPct val="100000"/>
+              <a:buNone/>
+            </a:pPr>
+            <a:endParaRPr lang="cs-CZ" sz="1200" dirty="0"/>
+          </a:p>
+          <a:p>
+            <a:pPr marL="342900" indent="-228600" algn="just">
+              <a:buSzPct val="100000"/>
+              <a:buFont typeface="+mj-lt"/>
+              <a:buAutoNum type="arabicPeriod"/>
+            </a:pPr>
+            <a:endParaRPr lang="cs-CZ" sz="1200" dirty="0"/>
+          </a:p>
+          <a:p>
+            <a:pPr algn="just"/>
+            <a:endParaRPr lang="cs-CZ" sz="1200" dirty="0"/>
+          </a:p>
+        </p:txBody>
+      </p:sp>
+      <p:sp>
+        <p:nvSpPr>
+          <p:cNvPr id="12" name="Zástupný symbol pro zápatí 11">
+            <a:extLst>
+              <a:ext uri="{FF2B5EF4-FFF2-40B4-BE49-F238E27FC236}">
+                <a16:creationId xmlns:a16="http://schemas.microsoft.com/office/drawing/2014/main" id="{2DD160FA-A7A8-1249-386C-02DB9B2CCBE7}"/>
+              </a:ext>
+            </a:extLst>
+          </p:cNvPr>
+          <p:cNvSpPr>
+            <a:spLocks noGrp="1"/>
+          </p:cNvSpPr>
+          <p:nvPr>
+            <p:ph type="ftr" sz="quarter" idx="3"/>
+          </p:nvPr>
+        </p:nvSpPr>
+        <p:spPr>
+          <a:xfrm>
+            <a:off x="251999" y="209500"/>
+            <a:ext cx="7560000" cy="365125"/>
+          </a:xfrm>
+        </p:spPr>
+        <p:txBody>
+          <a:bodyPr/>
+          <a:lstStyle/>
+          <a:p>
+            <a:r>
+              <a:rPr lang="cs-CZ" dirty="0"/>
+              <a:t>Vývoj algoritmu zarovnávání optických elementů s využitím obrazových dat ze zaměřovací kamery interferometru</a:t>
+            </a:r>
+          </a:p>
+        </p:txBody>
+      </p:sp>
+      <p:sp>
+        <p:nvSpPr>
+          <p:cNvPr id="18" name="Zástupný symbol pro datum 17">
+            <a:extLst>
+              <a:ext uri="{FF2B5EF4-FFF2-40B4-BE49-F238E27FC236}">
+                <a16:creationId xmlns:a16="http://schemas.microsoft.com/office/drawing/2014/main" id="{C8EE3E21-974A-4933-BF8B-5A33986BC19E}"/>
+              </a:ext>
+            </a:extLst>
+          </p:cNvPr>
+          <p:cNvSpPr>
+            <a:spLocks noGrp="1"/>
+          </p:cNvSpPr>
+          <p:nvPr>
+            <p:ph type="dt" sz="half" idx="11"/>
+          </p:nvPr>
+        </p:nvSpPr>
+        <p:spPr/>
+        <p:txBody>
+          <a:bodyPr/>
+          <a:lstStyle/>
+          <a:p>
+            <a:fld id="{9E039954-0893-4AC6-8021-245AB753B716}" type="datetime1">
+              <a:rPr lang="cs-CZ" smtClean="0"/>
+              <a:t>01.04.2026</a:t>
+            </a:fld>
+            <a:endParaRPr lang="cs-CZ" dirty="0"/>
+          </a:p>
+        </p:txBody>
+      </p:sp>
+      <p:pic>
+        <p:nvPicPr>
+          <p:cNvPr id="7" name="Picture 6">
+            <a:extLst>
+              <a:ext uri="{FF2B5EF4-FFF2-40B4-BE49-F238E27FC236}">
+                <a16:creationId xmlns:a16="http://schemas.microsoft.com/office/drawing/2014/main" id="{336418F5-0336-FDB2-4339-2833FBA883EA}"/>
+              </a:ext>
+            </a:extLst>
+          </p:cNvPr>
+          <p:cNvPicPr>
+            <a:picLocks noChangeAspect="1"/>
+          </p:cNvPicPr>
+          <p:nvPr/>
+        </p:nvPicPr>
+        <p:blipFill>
+          <a:blip r:embed="rId2">
+            <a:extLst>
+              <a:ext uri="{28A0092B-C50C-407E-A947-70E740481C1C}">
+                <a14:useLocalDpi xmlns:a14="http://schemas.microsoft.com/office/drawing/2010/main" val="0"/>
+              </a:ext>
+            </a:extLst>
+          </a:blip>
+          <a:stretch>
+            <a:fillRect/>
+          </a:stretch>
+        </p:blipFill>
+        <p:spPr>
+          <a:xfrm>
+            <a:off x="5740316" y="864679"/>
+            <a:ext cx="2997503" cy="3836140"/>
+          </a:xfrm>
+          <a:prstGeom prst="rect">
+            <a:avLst/>
+          </a:prstGeom>
+        </p:spPr>
+      </p:pic>
+      <p:pic>
+        <p:nvPicPr>
+          <p:cNvPr id="6" name="Picture 5">
+            <a:extLst>
+              <a:ext uri="{FF2B5EF4-FFF2-40B4-BE49-F238E27FC236}">
+                <a16:creationId xmlns:a16="http://schemas.microsoft.com/office/drawing/2014/main" id="{B044BAA0-8513-699D-18FA-F310CFD5B57B}"/>
+              </a:ext>
+            </a:extLst>
+          </p:cNvPr>
+          <p:cNvPicPr>
+            <a:picLocks noChangeAspect="1"/>
+          </p:cNvPicPr>
+          <p:nvPr/>
+        </p:nvPicPr>
+        <p:blipFill>
+          <a:blip r:embed="rId3">
+            <a:extLst>
+              <a:ext uri="{28A0092B-C50C-407E-A947-70E740481C1C}">
+                <a14:useLocalDpi xmlns:a14="http://schemas.microsoft.com/office/drawing/2010/main" val="0"/>
+              </a:ext>
+            </a:extLst>
+          </a:blip>
+          <a:stretch>
+            <a:fillRect/>
+          </a:stretch>
+        </p:blipFill>
+        <p:spPr>
+          <a:xfrm>
+            <a:off x="5740315" y="864677"/>
+            <a:ext cx="2997504" cy="3836142"/>
+          </a:xfrm>
+          <a:prstGeom prst="rect">
+            <a:avLst/>
+          </a:prstGeom>
+        </p:spPr>
+      </p:pic>
+      <p:pic>
+        <p:nvPicPr>
+          <p:cNvPr id="8" name="Picture 7">
+            <a:extLst>
+              <a:ext uri="{FF2B5EF4-FFF2-40B4-BE49-F238E27FC236}">
+                <a16:creationId xmlns:a16="http://schemas.microsoft.com/office/drawing/2014/main" id="{5B2C071C-67F7-B38F-44C5-1B97FABF84B1}"/>
+              </a:ext>
+            </a:extLst>
+          </p:cNvPr>
+          <p:cNvPicPr>
+            <a:picLocks noChangeAspect="1"/>
+          </p:cNvPicPr>
+          <p:nvPr/>
+        </p:nvPicPr>
+        <p:blipFill>
+          <a:blip r:embed="rId4">
+            <a:extLst>
+              <a:ext uri="{28A0092B-C50C-407E-A947-70E740481C1C}">
+                <a14:useLocalDpi xmlns:a14="http://schemas.microsoft.com/office/drawing/2010/main" val="0"/>
+              </a:ext>
+            </a:extLst>
+          </a:blip>
+          <a:stretch>
+            <a:fillRect/>
+          </a:stretch>
+        </p:blipFill>
+        <p:spPr>
+          <a:xfrm>
+            <a:off x="5740314" y="864676"/>
+            <a:ext cx="2997504" cy="3836142"/>
+          </a:xfrm>
+          <a:prstGeom prst="rect">
+            <a:avLst/>
+          </a:prstGeom>
+        </p:spPr>
+      </p:pic>
+      <p:pic>
+        <p:nvPicPr>
+          <p:cNvPr id="9" name="Picture 8">
+            <a:extLst>
+              <a:ext uri="{FF2B5EF4-FFF2-40B4-BE49-F238E27FC236}">
+                <a16:creationId xmlns:a16="http://schemas.microsoft.com/office/drawing/2014/main" id="{44E386AC-07E2-E759-BB59-C12160BF8053}"/>
+              </a:ext>
+            </a:extLst>
+          </p:cNvPr>
+          <p:cNvPicPr>
+            <a:picLocks noChangeAspect="1"/>
+          </p:cNvPicPr>
+          <p:nvPr/>
+        </p:nvPicPr>
+        <p:blipFill>
+          <a:blip r:embed="rId5">
+            <a:extLst>
+              <a:ext uri="{28A0092B-C50C-407E-A947-70E740481C1C}">
+                <a14:useLocalDpi xmlns:a14="http://schemas.microsoft.com/office/drawing/2010/main" val="0"/>
+              </a:ext>
+            </a:extLst>
+          </a:blip>
+          <a:stretch>
+            <a:fillRect/>
+          </a:stretch>
+        </p:blipFill>
+        <p:spPr>
+          <a:xfrm>
+            <a:off x="3222199" y="1771562"/>
+            <a:ext cx="2392052" cy="2392052"/>
+          </a:xfrm>
+          <a:prstGeom prst="rect">
+            <a:avLst/>
+          </a:prstGeom>
+        </p:spPr>
+      </p:pic>
+    </p:spTree>
+    <p:extLst>
+      <p:ext uri="{BB962C8B-B14F-4D97-AF65-F5344CB8AC3E}">
+        <p14:creationId xmlns:p14="http://schemas.microsoft.com/office/powerpoint/2010/main" val="3881143881"/>
+      </p:ext>
+    </p:extLst>
+  </p:cSld>
+  <p:clrMapOvr>
+    <a:masterClrMapping/>
+  </p:clrMapOvr>
+  <p:transition spd="med"/>
+</p:sld>
+</file>
+
+<file path=ppt/slides/slide8.xml><?xml version="1.0" encoding="utf-8"?>
+<p:sld xmlns:a="http://schemas.openxmlformats.org/drawingml/2006/main" xmlns:r="http://schemas.openxmlformats.org/officeDocument/2006/relationships" xmlns:p="http://schemas.openxmlformats.org/presentationml/2006/main">
+  <p:cSld>
+    <p:spTree>
+      <p:nvGrpSpPr>
+        <p:cNvPr id="1" name="">
+          <a:extLst>
+            <a:ext uri="{FF2B5EF4-FFF2-40B4-BE49-F238E27FC236}">
+              <a16:creationId xmlns:a16="http://schemas.microsoft.com/office/drawing/2014/main" id="{59CD0FE5-8278-FDF3-556D-8BD0435468CE}"/>
+            </a:ext>
+          </a:extLst>
+        </p:cNvPr>
+        <p:cNvGrpSpPr/>
+        <p:nvPr/>
+      </p:nvGrpSpPr>
+      <p:grpSpPr>
+        <a:xfrm>
+          <a:off x="0" y="0"/>
+          <a:ext cx="0" cy="0"/>
+          <a:chOff x="0" y="0"/>
+          <a:chExt cx="0" cy="0"/>
+        </a:xfrm>
+      </p:grpSpPr>
+      <p:pic>
+        <p:nvPicPr>
+          <p:cNvPr id="13" name="Picture 12">
+            <a:extLst>
+              <a:ext uri="{FF2B5EF4-FFF2-40B4-BE49-F238E27FC236}">
+                <a16:creationId xmlns:a16="http://schemas.microsoft.com/office/drawing/2014/main" id="{93F5311B-21E4-39D2-51DA-91FA0D35AEC9}"/>
+              </a:ext>
+            </a:extLst>
+          </p:cNvPr>
+          <p:cNvPicPr>
+            <a:picLocks noChangeAspect="1"/>
+          </p:cNvPicPr>
+          <p:nvPr/>
+        </p:nvPicPr>
+        <p:blipFill>
+          <a:blip r:embed="rId2"/>
+          <a:stretch>
+            <a:fillRect/>
+          </a:stretch>
+        </p:blipFill>
+        <p:spPr>
+          <a:xfrm>
+            <a:off x="3101746" y="1007499"/>
+            <a:ext cx="2697925" cy="3753390"/>
+          </a:xfrm>
+          <a:prstGeom prst="rect">
+            <a:avLst/>
+          </a:prstGeom>
+        </p:spPr>
+      </p:pic>
+      <p:sp>
+        <p:nvSpPr>
+          <p:cNvPr id="2" name="Title 1">
+            <a:extLst>
+              <a:ext uri="{FF2B5EF4-FFF2-40B4-BE49-F238E27FC236}">
+                <a16:creationId xmlns:a16="http://schemas.microsoft.com/office/drawing/2014/main" id="{2E1B4B0A-49D3-5407-529D-E42B47BEEAF6}"/>
+              </a:ext>
+            </a:extLst>
+          </p:cNvPr>
+          <p:cNvSpPr>
+            <a:spLocks noGrp="1"/>
+          </p:cNvSpPr>
+          <p:nvPr>
+            <p:ph type="title"/>
+          </p:nvPr>
+        </p:nvSpPr>
+        <p:spPr>
+          <a:xfrm>
+            <a:off x="251999" y="892969"/>
+            <a:ext cx="7560000" cy="560249"/>
+          </a:xfrm>
+        </p:spPr>
+        <p:txBody>
+          <a:bodyPr>
+            <a:noAutofit/>
+          </a:bodyPr>
+          <a:lstStyle/>
+          <a:p>
+            <a:r>
+              <a:rPr lang="cs-CZ" sz="2400" dirty="0"/>
+              <a:t>Posun vzorku po ose Z</a:t>
+            </a:r>
+          </a:p>
+        </p:txBody>
+      </p:sp>
+      <p:sp>
+        <p:nvSpPr>
+          <p:cNvPr id="3" name="Slide Number Placeholder 2">
+            <a:extLst>
+              <a:ext uri="{FF2B5EF4-FFF2-40B4-BE49-F238E27FC236}">
+                <a16:creationId xmlns:a16="http://schemas.microsoft.com/office/drawing/2014/main" id="{6304E776-9484-47D7-E702-D8FF32C66594}"/>
+              </a:ext>
+            </a:extLst>
+          </p:cNvPr>
+          <p:cNvSpPr>
+            <a:spLocks noGrp="1"/>
+          </p:cNvSpPr>
+          <p:nvPr>
+            <p:ph type="sldNum" sz="quarter" idx="2"/>
+          </p:nvPr>
+        </p:nvSpPr>
+        <p:spPr>
+          <a:xfrm>
+            <a:off x="8684345" y="4700819"/>
+            <a:ext cx="336813" cy="318396"/>
+          </a:xfrm>
+        </p:spPr>
+        <p:txBody>
+          <a:bodyPr/>
+          <a:lstStyle/>
+          <a:p>
+            <a:fld id="{86CB4B4D-7CA3-9044-876B-883B54F8677D}" type="slidenum">
+              <a:rPr lang="en-CZ" smtClean="0"/>
+              <a:pPr/>
+              <a:t>8</a:t>
+            </a:fld>
+            <a:endParaRPr lang="en-CZ"/>
+          </a:p>
+        </p:txBody>
+      </p:sp>
+      <mc:AlternateContent xmlns:mc="http://schemas.openxmlformats.org/markup-compatibility/2006">
+        <mc:Choice xmlns:a14="http://schemas.microsoft.com/office/drawing/2010/main" Requires="a14">
           <p:sp>
             <p:nvSpPr>
               <p:cNvPr id="4" name="Text Placeholder 3">
                 <a:extLst>
                   <a:ext uri="{FF2B5EF4-FFF2-40B4-BE49-F238E27FC236}">
-                    <a16:creationId xmlns:a16="http://schemas.microsoft.com/office/drawing/2014/main" id="{2062C487-C9D3-79CE-76BA-5C02F8401A50}"/>
+                    <a16:creationId xmlns:a16="http://schemas.microsoft.com/office/drawing/2014/main" id="{E238CF0C-BBA1-2D7B-B489-CDE9CA071B08}"/>
                   </a:ext>
                 </a:extLst>
               </p:cNvPr>
@@ -4972,26 +5799,39 @@
               </a:bodyPr>
               <a:lstStyle/>
               <a:p>
-                <a:pPr algn="just"/>
+                <a:pPr marL="114300" indent="0" algn="just">
+                  <a:buNone/>
+                </a:pPr>
                 <a:r>
-                  <a:rPr lang="cs-CZ" b="0" dirty="0"/>
-                  <a:t>Implementace pro osu Z</a:t>
+                  <a:rPr lang="cs-CZ" sz="1200" b="1" dirty="0"/>
+                  <a:t>Problém</a:t>
+                </a:r>
+                <a:r>
+                  <a:rPr lang="cs-CZ" sz="1200" dirty="0"/>
+                  <a:t>: Vzorek zmizí </a:t>
                 </a:r>
               </a:p>
               <a:p>
                 <a:pPr marL="114300" indent="0" algn="just">
                   <a:buNone/>
                 </a:pPr>
-                <a:endParaRPr lang="cs-CZ" sz="1400" b="0" i="1" dirty="0">
-                  <a:latin typeface="Cambria Math" panose="02040503050406030204" pitchFamily="18" charset="0"/>
-                </a:endParaRPr>
+                <a:r>
+                  <a:rPr lang="cs-CZ" sz="1200" dirty="0"/>
+                  <a:t>(posun na špatnou stranu)</a:t>
+                </a:r>
+              </a:p>
+              <a:p>
+                <a:pPr marL="114300" indent="0" algn="just">
+                  <a:buNone/>
+                </a:pPr>
+                <a:endParaRPr lang="cs-CZ" sz="1200" dirty="0"/>
               </a:p>
               <a:p>
                 <a:pPr marL="114300" indent="0" algn="just">
                   <a:buNone/>
                 </a:pPr>
                 <a:r>
-                  <a:rPr lang="cs-CZ" sz="1400" b="0" i="1" dirty="0">
+                  <a:rPr lang="cs-CZ" sz="1200" i="1" dirty="0">
                     <a:latin typeface="Cambria Math" panose="02040503050406030204" pitchFamily="18" charset="0"/>
                   </a:rPr>
                   <a:t>RR  -     radius referenčního bodu</a:t>
@@ -5002,7 +5842,7 @@
                   <a:buNone/>
                 </a:pPr>
                 <a:r>
-                  <a:rPr lang="cs-CZ" sz="1400" i="1" dirty="0">
+                  <a:rPr lang="cs-CZ" sz="1200" i="1" dirty="0">
                     <a:latin typeface="Cambria Math" panose="02040503050406030204" pitchFamily="18" charset="0"/>
                   </a:rPr>
                   <a:t>PZ   -    posun interferometru (Z)</a:t>
@@ -5013,7 +5853,7 @@
                   <a:buNone/>
                 </a:pPr>
                 <a:r>
-                  <a:rPr lang="cs-CZ" sz="1400" i="1" dirty="0">
+                  <a:rPr lang="cs-CZ" sz="1200" i="1" dirty="0">
                     <a:latin typeface="Cambria Math" panose="02040503050406030204" pitchFamily="18" charset="0"/>
                   </a:rPr>
                   <a:t>RV   -   radius vzorkového bodu</a:t>
@@ -5024,7 +5864,7 @@
                   <a:buNone/>
                 </a:pPr>
                 <a:r>
-                  <a:rPr lang="cs-CZ" sz="1400" b="0" i="1" dirty="0">
+                  <a:rPr lang="cs-CZ" sz="1200" i="1" dirty="0">
                     <a:latin typeface="Cambria Math" panose="02040503050406030204" pitchFamily="18" charset="0"/>
                   </a:rPr>
                   <a:t>RVS -   radius posunutého vzorkového bodu</a:t>
@@ -5035,7 +5875,7 @@
                   <a:buNone/>
                 </a:pPr>
                 <a:r>
-                  <a:rPr lang="cs-CZ" sz="1400" i="1" dirty="0">
+                  <a:rPr lang="cs-CZ" sz="1200" i="1" dirty="0">
                     <a:latin typeface="Cambria Math" panose="02040503050406030204" pitchFamily="18" charset="0"/>
                   </a:rPr>
                   <a:t>Z      -   vzdálenost mezi vzorkem </a:t>
@@ -5046,7 +5886,7 @@
                   <a:buNone/>
                 </a:pPr>
                 <a:r>
-                  <a:rPr lang="cs-CZ" sz="1400" i="1" dirty="0">
+                  <a:rPr lang="cs-CZ" sz="1200" i="1" dirty="0">
                     <a:latin typeface="Cambria Math" panose="02040503050406030204" pitchFamily="18" charset="0"/>
                   </a:rPr>
                   <a:t>             a referenšním bodem</a:t>
@@ -5056,7 +5896,7 @@
                 <a:pPr marL="114300" indent="0" algn="just">
                   <a:buNone/>
                 </a:pPr>
-                <a:endParaRPr lang="cs-CZ" sz="1400" b="0" i="1" dirty="0">
+                <a:endParaRPr lang="cs-CZ" sz="1200" i="1" dirty="0">
                   <a:latin typeface="Cambria Math" panose="02040503050406030204" pitchFamily="18" charset="0"/>
                 </a:endParaRPr>
               </a:p>
@@ -5071,13 +5911,13 @@
                     </m:oMathParaPr>
                     <m:oMath xmlns:m="http://schemas.openxmlformats.org/officeDocument/2006/math">
                       <m:r>
-                        <a:rPr lang="cs-CZ" sz="1400" b="0" i="1" smtClean="0">
+                        <a:rPr lang="cs-CZ" sz="1200" i="1">
                           <a:latin typeface="Cambria Math" panose="02040503050406030204" pitchFamily="18" charset="0"/>
                         </a:rPr>
                         <m:t>𝑧</m:t>
                       </m:r>
                       <m:r>
-                        <a:rPr lang="pt-BR" sz="1400" i="1" smtClean="0">
+                        <a:rPr lang="pt-BR" sz="1200" i="1">
                           <a:latin typeface="Cambria Math" panose="02040503050406030204" pitchFamily="18" charset="0"/>
                         </a:rPr>
                         <m:t>=</m:t>
@@ -5085,44 +5925,44 @@
                       <m:f>
                         <m:fPr>
                           <m:ctrlPr>
-                            <a:rPr lang="cs-CZ" sz="1400" i="1">
+                            <a:rPr lang="cs-CZ" sz="1200" i="1">
                               <a:latin typeface="Cambria Math" panose="02040503050406030204" pitchFamily="18" charset="0"/>
                             </a:rPr>
                           </m:ctrlPr>
                         </m:fPr>
                         <m:num>
                           <m:r>
-                            <a:rPr lang="cs-CZ" sz="1400" b="0" i="1" smtClean="0">
+                            <a:rPr lang="cs-CZ" sz="1200" i="1">
                               <a:latin typeface="Cambria Math" panose="02040503050406030204" pitchFamily="18" charset="0"/>
                             </a:rPr>
                             <m:t>𝑃𝑍</m:t>
                           </m:r>
                           <m:r>
-                            <a:rPr lang="cs-CZ" sz="1400" b="0" i="1" smtClean="0">
+                            <a:rPr lang="cs-CZ" sz="1200" i="1">
                               <a:latin typeface="Cambria Math" panose="02040503050406030204" pitchFamily="18" charset="0"/>
                             </a:rPr>
                             <m:t>(</m:t>
                           </m:r>
                           <m:r>
-                            <a:rPr lang="cs-CZ" sz="1400" i="1">
+                            <a:rPr lang="cs-CZ" sz="1200" i="1">
                               <a:latin typeface="Cambria Math" panose="02040503050406030204" pitchFamily="18" charset="0"/>
                             </a:rPr>
                             <m:t>𝑅𝑅</m:t>
                           </m:r>
                           <m:r>
-                            <a:rPr lang="cs-CZ" sz="1400" i="1">
+                            <a:rPr lang="cs-CZ" sz="1200" i="1">
                               <a:latin typeface="Cambria Math" panose="02040503050406030204" pitchFamily="18" charset="0"/>
                             </a:rPr>
                             <m:t>−</m:t>
                           </m:r>
                           <m:r>
-                            <a:rPr lang="cs-CZ" sz="1400" i="1">
+                            <a:rPr lang="cs-CZ" sz="1200" i="1">
                               <a:latin typeface="Cambria Math" panose="02040503050406030204" pitchFamily="18" charset="0"/>
                             </a:rPr>
                             <m:t>𝑅𝑉𝑆</m:t>
                           </m:r>
                           <m:r>
-                            <a:rPr lang="cs-CZ" sz="1400" b="0" i="1" smtClean="0">
+                            <a:rPr lang="cs-CZ" sz="1200" i="1">
                               <a:latin typeface="Cambria Math" panose="02040503050406030204" pitchFamily="18" charset="0"/>
                             </a:rPr>
                             <m:t>)</m:t>
@@ -5130,19 +5970,19 @@
                         </m:num>
                         <m:den>
                           <m:r>
-                            <a:rPr lang="cs-CZ" sz="1400" i="1">
+                            <a:rPr lang="cs-CZ" sz="1200" i="1">
                               <a:latin typeface="Cambria Math" panose="02040503050406030204" pitchFamily="18" charset="0"/>
                             </a:rPr>
                             <m:t>𝑅𝑉</m:t>
                           </m:r>
                           <m:r>
-                            <a:rPr lang="cs-CZ" sz="1400" i="1">
+                            <a:rPr lang="cs-CZ" sz="1200" i="1">
                               <a:latin typeface="Cambria Math" panose="02040503050406030204" pitchFamily="18" charset="0"/>
                             </a:rPr>
                             <m:t>−</m:t>
                           </m:r>
                           <m:r>
-                            <a:rPr lang="cs-CZ" sz="1400" i="1">
+                            <a:rPr lang="cs-CZ" sz="1200" i="1">
                               <a:latin typeface="Cambria Math" panose="02040503050406030204" pitchFamily="18" charset="0"/>
                             </a:rPr>
                             <m:t>𝑅𝑉𝑆</m:t>
@@ -5152,18 +5992,18 @@
                     </m:oMath>
                   </m:oMathPara>
                 </a14:m>
-                <a:endParaRPr lang="cs-CZ" sz="1400" dirty="0"/>
+                <a:endParaRPr lang="cs-CZ" sz="1200" dirty="0"/>
               </a:p>
             </p:txBody>
           </p:sp>
         </mc:Choice>
-        <mc:Fallback xmlns="">
+        <mc:Fallback>
           <p:sp>
             <p:nvSpPr>
               <p:cNvPr id="4" name="Text Placeholder 3">
                 <a:extLst>
                   <a:ext uri="{FF2B5EF4-FFF2-40B4-BE49-F238E27FC236}">
-                    <a16:creationId xmlns:a16="http://schemas.microsoft.com/office/drawing/2014/main" id="{2062C487-C9D3-79CE-76BA-5C02F8401A50}"/>
+                    <a16:creationId xmlns:a16="http://schemas.microsoft.com/office/drawing/2014/main" id="{E238CF0C-BBA1-2D7B-B489-CDE9CA071B08}"/>
                   </a:ext>
                 </a:extLst>
               </p:cNvPr>
@@ -5180,9 +6020,9 @@
                 <a:ext cx="7560000" cy="2982962"/>
               </a:xfrm>
               <a:blipFill>
-                <a:blip r:embed="rId2"/>
+                <a:blip r:embed="rId3"/>
                 <a:stretch>
-                  <a:fillRect l="-161"/>
+                  <a:fillRect/>
                 </a:stretch>
               </a:blipFill>
             </p:spPr>
@@ -5206,7 +6046,7 @@
           <p:cNvPr id="12" name="Zástupný symbol pro zápatí 11">
             <a:extLst>
               <a:ext uri="{FF2B5EF4-FFF2-40B4-BE49-F238E27FC236}">
-                <a16:creationId xmlns:a16="http://schemas.microsoft.com/office/drawing/2014/main" id="{BD73AAE1-D7B1-E7C4-30BC-23578883CE18}"/>
+                <a16:creationId xmlns:a16="http://schemas.microsoft.com/office/drawing/2014/main" id="{81EC87B9-01BE-30D6-3919-FCA293B53AB3}"/>
               </a:ext>
             </a:extLst>
           </p:cNvPr>
@@ -5239,7 +6079,7 @@
           <p:cNvPr id="18" name="Zástupný symbol pro datum 17">
             <a:extLst>
               <a:ext uri="{FF2B5EF4-FFF2-40B4-BE49-F238E27FC236}">
-                <a16:creationId xmlns:a16="http://schemas.microsoft.com/office/drawing/2014/main" id="{8B80FB6C-F280-03C9-0503-E463C997555C}"/>
+                <a16:creationId xmlns:a16="http://schemas.microsoft.com/office/drawing/2014/main" id="{D7E4A834-5813-71E9-92D5-AC8919501551}"/>
               </a:ext>
             </a:extLst>
           </p:cNvPr>
@@ -5257,7 +6097,7 @@
           <a:p>
             <a:fld id="{9E039954-0893-4AC6-8021-245AB753B716}" type="datetime1">
               <a:rPr lang="cs-CZ" smtClean="0"/>
-              <a:t>18.02.2026</a:t>
+              <a:t>01.04.2026</a:t>
             </a:fld>
             <a:endParaRPr lang="cs-CZ" dirty="0"/>
           </a:p>
@@ -5268,7 +6108,7 @@
           <p:cNvPr id="7" name="Picture 6">
             <a:extLst>
               <a:ext uri="{FF2B5EF4-FFF2-40B4-BE49-F238E27FC236}">
-                <a16:creationId xmlns:a16="http://schemas.microsoft.com/office/drawing/2014/main" id="{8506B7E4-DFBE-6F53-5CE4-43CA2EEEEB28}"/>
+                <a16:creationId xmlns:a16="http://schemas.microsoft.com/office/drawing/2014/main" id="{3CB3179F-CA16-872C-E39A-4F178FEB3217}"/>
               </a:ext>
             </a:extLst>
           </p:cNvPr>
@@ -5278,15 +6118,93 @@
           <p:nvPr/>
         </p:nvPicPr>
         <p:blipFill>
-          <a:blip r:embed="rId3"/>
+          <a:blip r:embed="rId4">
+            <a:extLst>
+              <a:ext uri="{28A0092B-C50C-407E-A947-70E740481C1C}">
+                <a14:useLocalDpi xmlns:a14="http://schemas.microsoft.com/office/drawing/2010/main" val="0"/>
+              </a:ext>
+            </a:extLst>
+          </a:blip>
           <a:stretch>
             <a:fillRect/>
           </a:stretch>
         </p:blipFill>
         <p:spPr>
           <a:xfrm>
-            <a:off x="4737606" y="1422303"/>
-            <a:ext cx="3714706" cy="3310183"/>
+            <a:off x="5740316" y="864679"/>
+            <a:ext cx="2997503" cy="3836140"/>
+          </a:xfrm>
+          <a:prstGeom prst="rect">
+            <a:avLst/>
+          </a:prstGeom>
+        </p:spPr>
+      </p:pic>
+      <p:pic>
+        <p:nvPicPr>
+          <p:cNvPr id="6" name="Picture 5">
+            <a:extLst>
+              <a:ext uri="{FF2B5EF4-FFF2-40B4-BE49-F238E27FC236}">
+                <a16:creationId xmlns:a16="http://schemas.microsoft.com/office/drawing/2014/main" id="{BF615D3C-E70C-37CC-7872-73944A493037}"/>
+              </a:ext>
+            </a:extLst>
+          </p:cNvPr>
+          <p:cNvPicPr>
+            <a:picLocks noChangeAspect="1"/>
+          </p:cNvPicPr>
+          <p:nvPr/>
+        </p:nvPicPr>
+        <p:blipFill>
+          <a:blip r:embed="rId5">
+            <a:extLst>
+              <a:ext uri="{28A0092B-C50C-407E-A947-70E740481C1C}">
+                <a14:useLocalDpi xmlns:a14="http://schemas.microsoft.com/office/drawing/2010/main" val="0"/>
+              </a:ext>
+            </a:extLst>
+          </a:blip>
+          <a:stretch>
+            <a:fillRect/>
+          </a:stretch>
+        </p:blipFill>
+        <p:spPr>
+          <a:xfrm>
+            <a:off x="5740315" y="864677"/>
+            <a:ext cx="2997504" cy="3836142"/>
+          </a:xfrm>
+          <a:prstGeom prst="rect">
+            <a:avLst/>
+          </a:prstGeom>
+        </p:spPr>
+      </p:pic>
+      <p:pic>
+        <p:nvPicPr>
+          <p:cNvPr id="8" name="Picture 7">
+            <a:extLst>
+              <a:ext uri="{FF2B5EF4-FFF2-40B4-BE49-F238E27FC236}">
+                <a16:creationId xmlns:a16="http://schemas.microsoft.com/office/drawing/2014/main" id="{8D086DC3-89E2-E036-2B28-BA65262BE760}"/>
+              </a:ext>
+            </a:extLst>
+          </p:cNvPr>
+          <p:cNvPicPr>
+            <a:picLocks noChangeAspect="1"/>
+          </p:cNvPicPr>
+          <p:nvPr/>
+        </p:nvPicPr>
+        <p:blipFill>
+          <a:blip r:embed="rId6">
+            <a:extLst>
+              <a:ext uri="{28A0092B-C50C-407E-A947-70E740481C1C}">
+                <a14:useLocalDpi xmlns:a14="http://schemas.microsoft.com/office/drawing/2010/main" val="0"/>
+              </a:ext>
+            </a:extLst>
+          </a:blip>
+          <a:stretch>
+            <a:fillRect/>
+          </a:stretch>
+        </p:blipFill>
+        <p:spPr>
+          <a:xfrm>
+            <a:off x="5740314" y="864679"/>
+            <a:ext cx="2997503" cy="3836140"/>
           </a:xfrm>
           <a:prstGeom prst="rect">
             <a:avLst/>
@@ -5296,234 +6214,7 @@
     </p:spTree>
     <p:extLst>
       <p:ext uri="{BB962C8B-B14F-4D97-AF65-F5344CB8AC3E}">
-        <p14:creationId xmlns:p14="http://schemas.microsoft.com/office/powerpoint/2010/main" val="3245585592"/>
-      </p:ext>
-    </p:extLst>
-  </p:cSld>
-  <p:clrMapOvr>
-    <a:masterClrMapping/>
-  </p:clrMapOvr>
-  <p:transition spd="med"/>
-</p:sld>
-</file>
-
-<file path=ppt/slides/slide8.xml><?xml version="1.0" encoding="utf-8"?>
-<p:sld xmlns:a="http://schemas.openxmlformats.org/drawingml/2006/main" xmlns:r="http://schemas.openxmlformats.org/officeDocument/2006/relationships" xmlns:p="http://schemas.openxmlformats.org/presentationml/2006/main">
-  <p:cSld>
-    <p:spTree>
-      <p:nvGrpSpPr>
-        <p:cNvPr id="1" name="">
-          <a:extLst>
-            <a:ext uri="{FF2B5EF4-FFF2-40B4-BE49-F238E27FC236}">
-              <a16:creationId xmlns:a16="http://schemas.microsoft.com/office/drawing/2014/main" id="{ED5BC621-A19A-FD59-9F12-D2043FEC7BC0}"/>
-            </a:ext>
-          </a:extLst>
-        </p:cNvPr>
-        <p:cNvGrpSpPr/>
-        <p:nvPr/>
-      </p:nvGrpSpPr>
-      <p:grpSpPr>
-        <a:xfrm>
-          <a:off x="0" y="0"/>
-          <a:ext cx="0" cy="0"/>
-          <a:chOff x="0" y="0"/>
-          <a:chExt cx="0" cy="0"/>
-        </a:xfrm>
-      </p:grpSpPr>
-      <p:sp>
-        <p:nvSpPr>
-          <p:cNvPr id="2" name="Title 1">
-            <a:extLst>
-              <a:ext uri="{FF2B5EF4-FFF2-40B4-BE49-F238E27FC236}">
-                <a16:creationId xmlns:a16="http://schemas.microsoft.com/office/drawing/2014/main" id="{03FDBB7A-D3C8-0DE1-1C10-3C473655263F}"/>
-              </a:ext>
-            </a:extLst>
-          </p:cNvPr>
-          <p:cNvSpPr>
-            <a:spLocks noGrp="1"/>
-          </p:cNvSpPr>
-          <p:nvPr>
-            <p:ph type="title"/>
-          </p:nvPr>
-        </p:nvSpPr>
-        <p:spPr>
-          <a:xfrm>
-            <a:off x="251999" y="892969"/>
-            <a:ext cx="7560000" cy="560249"/>
-          </a:xfrm>
-        </p:spPr>
-        <p:txBody>
-          <a:bodyPr>
-            <a:noAutofit/>
-          </a:bodyPr>
-          <a:lstStyle/>
-          <a:p>
-            <a:r>
-              <a:rPr lang="cs-CZ" sz="2400" dirty="0"/>
-              <a:t>Testování a optimalizace</a:t>
-            </a:r>
-          </a:p>
-        </p:txBody>
-      </p:sp>
-      <p:sp>
-        <p:nvSpPr>
-          <p:cNvPr id="3" name="Slide Number Placeholder 2">
-            <a:extLst>
-              <a:ext uri="{FF2B5EF4-FFF2-40B4-BE49-F238E27FC236}">
-                <a16:creationId xmlns:a16="http://schemas.microsoft.com/office/drawing/2014/main" id="{CE01C5AC-F19E-D797-5CAC-C9B2493F0ADD}"/>
-              </a:ext>
-            </a:extLst>
-          </p:cNvPr>
-          <p:cNvSpPr>
-            <a:spLocks noGrp="1"/>
-          </p:cNvSpPr>
-          <p:nvPr>
-            <p:ph type="sldNum" sz="quarter" idx="2"/>
-          </p:nvPr>
-        </p:nvSpPr>
-        <p:spPr>
-          <a:xfrm>
-            <a:off x="8684345" y="4700819"/>
-            <a:ext cx="336813" cy="318396"/>
-          </a:xfrm>
-        </p:spPr>
-        <p:txBody>
-          <a:bodyPr/>
-          <a:lstStyle/>
-          <a:p>
-            <a:fld id="{86CB4B4D-7CA3-9044-876B-883B54F8677D}" type="slidenum">
-              <a:rPr lang="en-CZ" smtClean="0"/>
-              <a:pPr/>
-              <a:t>8</a:t>
-            </a:fld>
-            <a:endParaRPr lang="en-CZ"/>
-          </a:p>
-        </p:txBody>
-      </p:sp>
-      <p:sp>
-        <p:nvSpPr>
-          <p:cNvPr id="4" name="Text Placeholder 3">
-            <a:extLst>
-              <a:ext uri="{FF2B5EF4-FFF2-40B4-BE49-F238E27FC236}">
-                <a16:creationId xmlns:a16="http://schemas.microsoft.com/office/drawing/2014/main" id="{FDB76D91-FA33-7C17-515A-8230EE3341B9}"/>
-              </a:ext>
-            </a:extLst>
-          </p:cNvPr>
-          <p:cNvSpPr>
-            <a:spLocks noGrp="1"/>
-          </p:cNvSpPr>
-          <p:nvPr>
-            <p:ph type="body" idx="1"/>
-          </p:nvPr>
-        </p:nvSpPr>
-        <p:spPr>
-          <a:xfrm>
-            <a:off x="252000" y="1585914"/>
-            <a:ext cx="7560000" cy="2982962"/>
-          </a:xfrm>
-        </p:spPr>
-        <p:txBody>
-          <a:bodyPr>
-            <a:noAutofit/>
-          </a:bodyPr>
-          <a:lstStyle/>
-          <a:p>
-            <a:pPr algn="just"/>
-            <a:r>
-              <a:rPr lang="cs-CZ" dirty="0"/>
-              <a:t>Testování algoritmu na simulovaných a reálných datech</a:t>
-            </a:r>
-          </a:p>
-          <a:p>
-            <a:pPr algn="just"/>
-            <a:r>
-              <a:rPr lang="cs-CZ" dirty="0"/>
-              <a:t>Ověření funkčnosti detekce stopy vzorku</a:t>
-            </a:r>
-          </a:p>
-          <a:p>
-            <a:pPr algn="just"/>
-            <a:r>
-              <a:rPr lang="cs-CZ" dirty="0"/>
-              <a:t>Ladění parametrů pro zvýšení stability</a:t>
-            </a:r>
-          </a:p>
-          <a:p>
-            <a:pPr algn="just"/>
-            <a:r>
-              <a:rPr lang="cs-CZ" dirty="0"/>
-              <a:t>Optimalizace výpočetní rychlosti</a:t>
-            </a:r>
-            <a:endParaRPr lang="cs-CZ" b="0" dirty="0"/>
-          </a:p>
-        </p:txBody>
-      </p:sp>
-      <p:sp>
-        <p:nvSpPr>
-          <p:cNvPr id="12" name="Zástupný symbol pro zápatí 11">
-            <a:extLst>
-              <a:ext uri="{FF2B5EF4-FFF2-40B4-BE49-F238E27FC236}">
-                <a16:creationId xmlns:a16="http://schemas.microsoft.com/office/drawing/2014/main" id="{E958AEB0-A856-A209-D5D2-75BF28827233}"/>
-              </a:ext>
-            </a:extLst>
-          </p:cNvPr>
-          <p:cNvSpPr>
-            <a:spLocks noGrp="1"/>
-          </p:cNvSpPr>
-          <p:nvPr>
-            <p:ph type="ftr" sz="quarter" idx="3"/>
-          </p:nvPr>
-        </p:nvSpPr>
-        <p:spPr>
-          <a:xfrm>
-            <a:off x="251999" y="209500"/>
-            <a:ext cx="7560000" cy="365125"/>
-          </a:xfrm>
-        </p:spPr>
-        <p:txBody>
-          <a:bodyPr/>
-          <a:lstStyle/>
-          <a:p>
-            <a:r>
-              <a:rPr lang="cs-CZ" dirty="0"/>
-              <a:t>Vývoj algoritmu zarovnávání optických elementů s využitím obrazových dat ze zaměřovací kamery interferometru</a:t>
-            </a:r>
-          </a:p>
-        </p:txBody>
-      </p:sp>
-      <p:sp>
-        <p:nvSpPr>
-          <p:cNvPr id="18" name="Zástupný symbol pro datum 17">
-            <a:extLst>
-              <a:ext uri="{FF2B5EF4-FFF2-40B4-BE49-F238E27FC236}">
-                <a16:creationId xmlns:a16="http://schemas.microsoft.com/office/drawing/2014/main" id="{740FF797-73A9-CEFA-7BEB-FF01BD13F5E6}"/>
-              </a:ext>
-            </a:extLst>
-          </p:cNvPr>
-          <p:cNvSpPr>
-            <a:spLocks noGrp="1"/>
-          </p:cNvSpPr>
-          <p:nvPr>
-            <p:ph type="dt" sz="half" idx="11"/>
-          </p:nvPr>
-        </p:nvSpPr>
-        <p:spPr/>
-        <p:txBody>
-          <a:bodyPr/>
-          <a:lstStyle/>
-          <a:p>
-            <a:fld id="{9E039954-0893-4AC6-8021-245AB753B716}" type="datetime1">
-              <a:rPr lang="cs-CZ" smtClean="0"/>
-              <a:t>18.02.2026</a:t>
-            </a:fld>
-            <a:endParaRPr lang="cs-CZ" dirty="0"/>
-          </a:p>
-        </p:txBody>
-      </p:sp>
-    </p:spTree>
-    <p:extLst>
-      <p:ext uri="{BB962C8B-B14F-4D97-AF65-F5344CB8AC3E}">
-        <p14:creationId xmlns:p14="http://schemas.microsoft.com/office/powerpoint/2010/main" val="3695542150"/>
+        <p14:creationId xmlns:p14="http://schemas.microsoft.com/office/powerpoint/2010/main" val="2867449226"/>
       </p:ext>
     </p:extLst>
   </p:cSld>
@@ -5542,7 +6233,7 @@
         <p:cNvPr id="1" name="">
           <a:extLst>
             <a:ext uri="{FF2B5EF4-FFF2-40B4-BE49-F238E27FC236}">
-              <a16:creationId xmlns:a16="http://schemas.microsoft.com/office/drawing/2014/main" id="{8DC8BAEA-3834-BE57-5340-7BBC4CD1B6C8}"/>
+              <a16:creationId xmlns:a16="http://schemas.microsoft.com/office/drawing/2014/main" id="{2D6C0BEA-0E44-27D3-F053-2AA77E15A008}"/>
             </a:ext>
           </a:extLst>
         </p:cNvPr>
@@ -5562,7 +6253,7 @@
           <p:cNvPr id="2" name="Title 1">
             <a:extLst>
               <a:ext uri="{FF2B5EF4-FFF2-40B4-BE49-F238E27FC236}">
-                <a16:creationId xmlns:a16="http://schemas.microsoft.com/office/drawing/2014/main" id="{33A17EAC-FB6A-C679-93FB-BBB76BB67F49}"/>
+                <a16:creationId xmlns:a16="http://schemas.microsoft.com/office/drawing/2014/main" id="{3F310F4A-4485-73C3-8BFB-563B779594B7}"/>
               </a:ext>
             </a:extLst>
           </p:cNvPr>
@@ -5587,7 +6278,7 @@
           <a:p>
             <a:r>
               <a:rPr lang="cs-CZ" sz="2400" dirty="0"/>
-              <a:t>Vyhodnocení výsledků</a:t>
+              <a:t>Testy </a:t>
             </a:r>
           </a:p>
         </p:txBody>
@@ -5597,7 +6288,7 @@
           <p:cNvPr id="3" name="Slide Number Placeholder 2">
             <a:extLst>
               <a:ext uri="{FF2B5EF4-FFF2-40B4-BE49-F238E27FC236}">
-                <a16:creationId xmlns:a16="http://schemas.microsoft.com/office/drawing/2014/main" id="{A08B371B-F252-EA1D-312D-C6C82953367E}"/>
+                <a16:creationId xmlns:a16="http://schemas.microsoft.com/office/drawing/2014/main" id="{D69A58B5-B468-704B-E7CC-6CDAEECA19DA}"/>
               </a:ext>
             </a:extLst>
           </p:cNvPr>
@@ -5632,7 +6323,7 @@
           <p:cNvPr id="4" name="Text Placeholder 3">
             <a:extLst>
               <a:ext uri="{FF2B5EF4-FFF2-40B4-BE49-F238E27FC236}">
-                <a16:creationId xmlns:a16="http://schemas.microsoft.com/office/drawing/2014/main" id="{8DD35842-56F2-B8CE-44BB-846ED27B3A3F}"/>
+                <a16:creationId xmlns:a16="http://schemas.microsoft.com/office/drawing/2014/main" id="{26DE7BB3-DBF8-706A-F970-8B93FEB240F4}"/>
               </a:ext>
             </a:extLst>
           </p:cNvPr>
@@ -5657,30 +6348,20 @@
           <a:p>
             <a:pPr algn="just"/>
             <a:r>
-              <a:rPr lang="cs-CZ" dirty="0"/>
-              <a:t>Ověření přesnosti detekce polohy</a:t>
+              <a:rPr lang="cs-CZ" sz="1200" dirty="0"/>
+              <a:t>Pokud jsou všechny problémy vyřešeny</a:t>
             </a:r>
           </a:p>
           <a:p>
             <a:pPr algn="just"/>
             <a:r>
-              <a:rPr lang="cs-CZ" dirty="0"/>
-              <a:t>Dosažená přesnost přibližně 0,01 mm</a:t>
+              <a:rPr lang="cs-CZ" sz="1200" dirty="0"/>
+              <a:t>Kontrola výsledků algoritmu se zadávacími parametry ze simulátoru</a:t>
             </a:r>
           </a:p>
           <a:p>
             <a:pPr algn="just"/>
-            <a:r>
-              <a:rPr lang="cs-CZ" dirty="0"/>
-              <a:t>Posouzení robustnosti algoritmu</a:t>
-            </a:r>
-          </a:p>
-          <a:p>
-            <a:pPr algn="just"/>
-            <a:r>
-              <a:rPr lang="cs-CZ" dirty="0"/>
-              <a:t>Vyhodnocení časové náročnosti výpočtu</a:t>
-            </a:r>
+            <a:endParaRPr lang="cs-CZ" sz="1200" dirty="0"/>
           </a:p>
         </p:txBody>
       </p:sp>
@@ -5689,7 +6370,7 @@
           <p:cNvPr id="12" name="Zástupný symbol pro zápatí 11">
             <a:extLst>
               <a:ext uri="{FF2B5EF4-FFF2-40B4-BE49-F238E27FC236}">
-                <a16:creationId xmlns:a16="http://schemas.microsoft.com/office/drawing/2014/main" id="{B0714987-BC0D-96A4-4A4C-8DE6C57ECB5E}"/>
+                <a16:creationId xmlns:a16="http://schemas.microsoft.com/office/drawing/2014/main" id="{ACD5793C-FAF7-1119-CC81-AD79A9C53204}"/>
               </a:ext>
             </a:extLst>
           </p:cNvPr>
@@ -5722,7 +6403,7 @@
           <p:cNvPr id="18" name="Zástupný symbol pro datum 17">
             <a:extLst>
               <a:ext uri="{FF2B5EF4-FFF2-40B4-BE49-F238E27FC236}">
-                <a16:creationId xmlns:a16="http://schemas.microsoft.com/office/drawing/2014/main" id="{82FE48BF-71B9-DF3F-73D4-E663B36BF64C}"/>
+                <a16:creationId xmlns:a16="http://schemas.microsoft.com/office/drawing/2014/main" id="{7B33F9A2-8994-78F4-9276-52BB931E52DC}"/>
               </a:ext>
             </a:extLst>
           </p:cNvPr>
@@ -5740,16 +6421,124 @@
           <a:p>
             <a:fld id="{9E039954-0893-4AC6-8021-245AB753B716}" type="datetime1">
               <a:rPr lang="cs-CZ" smtClean="0"/>
-              <a:t>18.02.2026</a:t>
+              <a:t>01.04.2026</a:t>
             </a:fld>
             <a:endParaRPr lang="cs-CZ" dirty="0"/>
           </a:p>
         </p:txBody>
       </p:sp>
+      <p:pic>
+        <p:nvPicPr>
+          <p:cNvPr id="7" name="Picture 6">
+            <a:extLst>
+              <a:ext uri="{FF2B5EF4-FFF2-40B4-BE49-F238E27FC236}">
+                <a16:creationId xmlns:a16="http://schemas.microsoft.com/office/drawing/2014/main" id="{CCA6ABB4-B2D1-2494-3D9D-3F783DC7A9C2}"/>
+              </a:ext>
+            </a:extLst>
+          </p:cNvPr>
+          <p:cNvPicPr>
+            <a:picLocks noChangeAspect="1"/>
+          </p:cNvPicPr>
+          <p:nvPr/>
+        </p:nvPicPr>
+        <p:blipFill>
+          <a:blip r:embed="rId2">
+            <a:extLst>
+              <a:ext uri="{28A0092B-C50C-407E-A947-70E740481C1C}">
+                <a14:useLocalDpi xmlns:a14="http://schemas.microsoft.com/office/drawing/2010/main" val="0"/>
+              </a:ext>
+            </a:extLst>
+          </a:blip>
+          <a:stretch>
+            <a:fillRect/>
+          </a:stretch>
+        </p:blipFill>
+        <p:spPr>
+          <a:xfrm>
+            <a:off x="5740316" y="864679"/>
+            <a:ext cx="2997503" cy="3836140"/>
+          </a:xfrm>
+          <a:prstGeom prst="rect">
+            <a:avLst/>
+          </a:prstGeom>
+        </p:spPr>
+      </p:pic>
+      <p:pic>
+        <p:nvPicPr>
+          <p:cNvPr id="6" name="Picture 5">
+            <a:extLst>
+              <a:ext uri="{FF2B5EF4-FFF2-40B4-BE49-F238E27FC236}">
+                <a16:creationId xmlns:a16="http://schemas.microsoft.com/office/drawing/2014/main" id="{3C2B9520-F2B5-777C-E152-33B645CAEC55}"/>
+              </a:ext>
+            </a:extLst>
+          </p:cNvPr>
+          <p:cNvPicPr>
+            <a:picLocks noChangeAspect="1"/>
+          </p:cNvPicPr>
+          <p:nvPr/>
+        </p:nvPicPr>
+        <p:blipFill>
+          <a:blip r:embed="rId3">
+            <a:extLst>
+              <a:ext uri="{28A0092B-C50C-407E-A947-70E740481C1C}">
+                <a14:useLocalDpi xmlns:a14="http://schemas.microsoft.com/office/drawing/2010/main" val="0"/>
+              </a:ext>
+            </a:extLst>
+          </a:blip>
+          <a:stretch>
+            <a:fillRect/>
+          </a:stretch>
+        </p:blipFill>
+        <p:spPr>
+          <a:xfrm>
+            <a:off x="5740315" y="864677"/>
+            <a:ext cx="2997504" cy="3836142"/>
+          </a:xfrm>
+          <a:prstGeom prst="rect">
+            <a:avLst/>
+          </a:prstGeom>
+        </p:spPr>
+      </p:pic>
+      <p:pic>
+        <p:nvPicPr>
+          <p:cNvPr id="8" name="Picture 7">
+            <a:extLst>
+              <a:ext uri="{FF2B5EF4-FFF2-40B4-BE49-F238E27FC236}">
+                <a16:creationId xmlns:a16="http://schemas.microsoft.com/office/drawing/2014/main" id="{D56488DA-4AF4-28E0-4567-CE826EA7FAF0}"/>
+              </a:ext>
+            </a:extLst>
+          </p:cNvPr>
+          <p:cNvPicPr>
+            <a:picLocks noChangeAspect="1"/>
+          </p:cNvPicPr>
+          <p:nvPr/>
+        </p:nvPicPr>
+        <p:blipFill>
+          <a:blip r:embed="rId4">
+            <a:extLst>
+              <a:ext uri="{28A0092B-C50C-407E-A947-70E740481C1C}">
+                <a14:useLocalDpi xmlns:a14="http://schemas.microsoft.com/office/drawing/2010/main" val="0"/>
+              </a:ext>
+            </a:extLst>
+          </a:blip>
+          <a:stretch>
+            <a:fillRect/>
+          </a:stretch>
+        </p:blipFill>
+        <p:spPr>
+          <a:xfrm>
+            <a:off x="5740316" y="864677"/>
+            <a:ext cx="2997503" cy="3836140"/>
+          </a:xfrm>
+          <a:prstGeom prst="rect">
+            <a:avLst/>
+          </a:prstGeom>
+        </p:spPr>
+      </p:pic>
     </p:spTree>
     <p:extLst>
       <p:ext uri="{BB962C8B-B14F-4D97-AF65-F5344CB8AC3E}">
-        <p14:creationId xmlns:p14="http://schemas.microsoft.com/office/powerpoint/2010/main" val="3305830501"/>
+        <p14:creationId xmlns:p14="http://schemas.microsoft.com/office/powerpoint/2010/main" val="4078055475"/>
       </p:ext>
     </p:extLst>
   </p:cSld>
